--- a/en/slides/01-Computer_Architecture-PRG32_and_PRG32-QT_Setup.pptx
+++ b/en/slides/01-Computer_Architecture-PRG32_and_PRG32-QT_Setup.pptx
@@ -122,14 +122,14 @@
   <p:extLst>
     <p:ext uri="{521415D9-36F7-43E2-AB2F-B90AF26B5E84}">
       <p14:sectionLst xmlns:p14="http://schemas.microsoft.com/office/powerpoint/2010/main">
-        <p14:section name="Opening" id="{56fcadcd-1b9f-9fbb-a68b-aea47eb68f64}">
+        <p14:section name="Opening" id="{815e307e-7996-ff1d-1f24-86da7d91698b}">
           <p14:sldIdLst>
             <p14:sldId id="256"/>
             <p14:sldId id="257"/>
             <p14:sldId id="258"/>
           </p14:sldIdLst>
         </p14:section>
-        <p14:section name="The platform, in detail" id="{0dfa962e-4b0f-0d3b-ff6c-02595e4e1db7}">
+        <p14:section name="The platform, in detail" id="{6dc712f2-6db4-6429-d5ca-3d13ea02ec47}">
           <p14:sldIdLst>
             <p14:sldId id="259"/>
             <p14:sldId id="260"/>
@@ -139,12 +139,12 @@
             <p14:sldId id="264"/>
           </p14:sldIdLst>
         </p14:section>
-        <p14:section name="Step 2: install the toolchain" id="{fd8459bf-2595-a2f2-4279-aa72eadba509}">
+        <p14:section name="Step 2: install the toolchain" id="{c8e2200b-bc36-262e-75bd-3d72e9e84b85}">
           <p14:sldIdLst>
             <p14:sldId id="265"/>
           </p14:sldIdLst>
         </p14:section>
-        <p14:section name="When something does not work" id="{90060d73-3f69-5779-258e-7790c16b83ba}">
+        <p14:section name="When something does not work" id="{e7317b8b-e87c-6a35-04c2-af070b57bc9b}">
           <p14:sldIdLst>
             <p14:sldId id="266"/>
             <p14:sldId id="267"/>
@@ -2924,7 +2924,63 @@
       </p:sp>
       <p:sp>
         <p:nvSpPr>
-          <p:cNvPr id="12" name="Shape 10"/>
+          <p:cNvPr id="12" name="Text 10"/>
+          <p:cNvSpPr txBox="1"/>
+          <p:nvPr/>
+        </p:nvSpPr>
+        <p:spPr>
+          <a:xfrm>
+            <a:off x="4693615" y="566928"/>
+            <a:ext cx="6949440" cy="640080"/>
+          </a:xfrm>
+          <a:prstGeom prst="rect">
+            <a:avLst/>
+          </a:prstGeom>
+          <a:noFill/>
+          <a:ln/>
+        </p:spPr>
+        <p:txBody>
+          <a:bodyPr wrap="square" lIns="0" tIns="0" rIns="0" bIns="0" rtlCol="0" anchor="t"/>
+          <a:lstStyle/>
+          <a:p>
+            <a:pPr algn="r" indent="0" marL="0">
+              <a:buNone/>
+            </a:pPr>
+            <a:r>
+              <a:rPr lang="en-US" sz="1300" dirty="0">
+                <a:solidFill>
+                  <a:srgbClr val="CFE3EA"/>
+                </a:solidFill>
+                <a:latin typeface="Calibri" pitchFamily="34" charset="0"/>
+                <a:ea typeface="Calibri" pitchFamily="34" charset="-122"/>
+                <a:cs typeface="Calibri" pitchFamily="34" charset="-120"/>
+              </a:rPr>
+              <a:t>Lecture deck. The listings, the complete program and how to test it are in the code deck:</a:t>
+            </a:r>
+            <a:endParaRPr lang="en-US" sz="1300" dirty="0"/>
+          </a:p>
+          <a:p>
+            <a:pPr algn="r" indent="0" marL="0">
+              <a:buNone/>
+            </a:pPr>
+            <a:r>
+              <a:rPr lang="en-US" sz="1300" dirty="0">
+                <a:solidFill>
+                  <a:srgbClr val="CFE3EA"/>
+                </a:solidFill>
+                <a:latin typeface="Calibri" pitchFamily="34" charset="0"/>
+                <a:ea typeface="Calibri" pitchFamily="34" charset="-122"/>
+                <a:cs typeface="Calibri" pitchFamily="34" charset="-120"/>
+              </a:rPr>
+              <a:t>01-Computer_Architecture-PRG32_and_PRG32-QT_Setup-Code.pptx</a:t>
+            </a:r>
+            <a:endParaRPr lang="en-US" sz="1300" dirty="0"/>
+          </a:p>
+        </p:txBody>
+      </p:sp>
+      <p:sp>
+        <p:nvSpPr>
+          <p:cNvPr id="13" name="Shape 11"/>
           <p:cNvSpPr/>
           <p:nvPr/>
         </p:nvSpPr>
@@ -2951,7 +3007,7 @@
       </p:sp>
       <p:pic>
         <p:nvPicPr>
-          <p:cNvPr id="13" name="Image 0" descr="/Users/raffaelemontella/devel/riscv-prg32/computer-architecture-with-prg32/tools/assets/prg32qt_debugger.png">    </p:cNvPr>
+          <p:cNvPr id="14" name="Image 0" descr="/Users/raffaelemontella/devel/riscv-prg32/computer-architecture-with-prg32/tools/assets/prg32qt_debugger.png">    </p:cNvPr>
           <p:cNvPicPr>
             <a:picLocks noChangeAspect="1"/>
           </p:cNvPicPr>

--- a/en/slides/01-Computer_Architecture-PRG32_and_PRG32-QT_Setup.pptx
+++ b/en/slides/01-Computer_Architecture-PRG32_and_PRG32-QT_Setup.pptx
@@ -122,14 +122,14 @@
   <p:extLst>
     <p:ext uri="{521415D9-36F7-43E2-AB2F-B90AF26B5E84}">
       <p14:sectionLst xmlns:p14="http://schemas.microsoft.com/office/powerpoint/2010/main">
-        <p14:section name="Opening" id="{815e307e-7996-ff1d-1f24-86da7d91698b}">
+        <p14:section name="Opening" id="{27ff9ed0-7460-9188-e40a-4ab697af9e03}">
           <p14:sldIdLst>
             <p14:sldId id="256"/>
             <p14:sldId id="257"/>
             <p14:sldId id="258"/>
           </p14:sldIdLst>
         </p14:section>
-        <p14:section name="The platform, in detail" id="{6dc712f2-6db4-6429-d5ca-3d13ea02ec47}">
+        <p14:section name="The platform, in detail" id="{abadef5d-034b-ae5d-3012-89f6625c4897}">
           <p14:sldIdLst>
             <p14:sldId id="259"/>
             <p14:sldId id="260"/>
@@ -139,12 +139,12 @@
             <p14:sldId id="264"/>
           </p14:sldIdLst>
         </p14:section>
-        <p14:section name="Step 2: install the toolchain" id="{c8e2200b-bc36-262e-75bd-3d72e9e84b85}">
+        <p14:section name="Step 2: install the toolchain" id="{e22d9990-29ab-177e-f639-83046b93e5fb}">
           <p14:sldIdLst>
             <p14:sldId id="265"/>
           </p14:sldIdLst>
         </p14:section>
-        <p14:section name="When something does not work" id="{e7317b8b-e87c-6a35-04c2-af070b57bc9b}">
+        <p14:section name="When something does not work" id="{d035dc3c-dbe3-58df-2de7-0321974c9620}">
           <p14:sldIdLst>
             <p14:sldId id="266"/>
             <p14:sldId id="267"/>
@@ -559,6 +559,8 @@
             <a:r>
               <a:rPr lang="en-US" dirty="0"/>
               <a:t>This lecture is a workshop, in both senses: you work with your hands, and you leave with a place where things can be made. Nothing here is theory. At the end your laptop runs PRG32-QT, the compiler for RISC-V is installed, and one cartridge built by you is stopped in the debugger. The quotation about the axe is the justification for spending two hours on tools: every later lecture assumes that building and running a program costs you one command and ten seconds.
+Learning status: UNDERSTAND NOW, by the end of this lecture you explain it, trace it and apply it on your own; USE NOW, you follow and use the recipe today; how it works inside is explained later, or is not part of the course; UNDERSTAND LATER, recognise the name and what it is for; a later lecture explains it. A slide without a badge is context: a story, an example, a question, an exercise.
+Learning status of this lecture. UNDERSTAND NOW: the pieces of PRG32. USE NOW: the PRG32 tools, the PRG32-QT debugger, the complete program (used, not studied, in this course). UNDERSTAND LATER: the init, update, draw contract (Lecture 02); registers (Lecture 02). A slide without a badge is context: a story, an example, a question, an exercise.
 For the lecturer: New in 2026/27: a hands-on lecture. Students bring a laptop; at the end everyone has PRG32-QT running and a cartridge built by their own toolchain. The steps come from the README of PRG32, the documentation of PRG32-QT and chapter 3 of the textbook. The cartridge commands of step 3 were run on macOS against PRG32-QT; the Windows and Linux installations follow the official instructions and were not run for these slides. Ask the students to do the long download of step 2 at home, before the lecture: the classroom network will not survive sixty copies of ESP-IDF. Version numbers are those of October 2026: check the release pages before class.</a:t>
             </a:r>
             <a:endParaRPr lang="en-US" dirty="0"/>
@@ -648,6 +650,7 @@
             <a:r>
               <a:rPr lang="en-US" dirty="0"/>
               <a:t>One idea explains every installation and nearly every problem. The compiler comes with ESP-IDF, the development kit of Espressif, installed for two chips: esp32c6, the kit, and esp32c3, the emulator. But ESP-IDF is not active by itself: each new terminal must switch it on before the tools can be found. The box on the right shows the message you will certainly meet, idf.py: command not found. It does not mean that something is broken. It means that ESP-IDF is not active in the terminal in which you are typing.
+USE NOW: the PRG32 tools (used, not studied, in this course).
 For the lecturer: On Windows activating means opening the ESP-IDF PowerShell; on macOS and Linux, running export.sh. The symptom is always the same: idf.py, or riscv32-esp-elf-gcc, not found.</a:t>
             </a:r>
             <a:endParaRPr lang="en-US" dirty="0"/>
@@ -737,6 +740,7 @@
             <a:r>
               <a:rPr lang="en-US" dirty="0"/>
               <a:t>Read the table from left to right: what you see, what it means, what to do. The first row covers most cases: idf.py: command not found means that ESP-IDF is not active in this terminal. No module named prg32 means that you are not in the PRG32 folder. A refused connection means that PRG32-QT is not running, or that a firewall blocks port 8080. When you ask for help, paste the command and the complete message as text: a photograph of the screen cannot be searched or copied.
+USE NOW: the PRG32 tools (used, not studied, in this course).
 For the lecturer: The first row covers most of the cases. docs/usage/troubleshooting.md of the PRG32 repository has the complete list. When asking for help, paste the command and the whole message: never a photograph of the screen.</a:t>
             </a:r>
             <a:endParaRPr lang="en-US" dirty="0"/>
@@ -1183,6 +1187,7 @@
             <a:r>
               <a:rPr lang="en-US" dirty="0"/>
               <a:t>Four sentences to keep. PRG32 is a runtime, a cartridge format, a tool and a Store, and a cartridge runs unchanged on three hosts. PRG32-QT is enough to play and debug; ESP-IDF and the repository are needed to build. ESP-IDF must be activated in every new terminal. And you have completed the loop of the whole course: build, send, stop in the debugger. The readings are the README files of the two repositories; Lecture 02 uses this workshop for your first assembly program.
+Learning status, recap. UNDERSTAND NOW: the pieces of PRG32. USE NOW: the PRG32 tools, the PRG32-QT debugger, the complete program (used, not studied, in this course). UNDERSTAND LATER: the init, update, draw contract (Lecture 02); registers (Lecture 02). A slide without a badge is context: a story, an example, a question, an exercise.
 For the lecturer: Next: Lecture 02, the first program in RISC-V assembly, typed by the students in the workshop they have just set up.</a:t>
             </a:r>
             <a:endParaRPr lang="en-US" dirty="0"/>
@@ -1449,6 +1454,7 @@
             <a:r>
               <a:rPr lang="en-US" dirty="0"/>
               <a:t>The name PRG32 covers four things. A firmware, the resident program that owns the screen, the buttons and the sound. A cartridge format, your game as one small file. A tool on your laptop, the command python3 -m prg32, which builds, uploads and packages. And a Store, where finished games are shared. Your code is real 32-bit RISC-V machine code, and it meets the firmware through a contract of three functions: init, called once, then update and draw, called at every frame. Lecture 02 starts exactly from this contract.
+UNDERSTAND NOW: the pieces of PRG32.
 For the lecturer: github.com/riscv-prg32/PRG32. The runtime calls init once, then update and draw at every frame: Lecture 02 starts from this contract.</a:t>
             </a:r>
             <a:endParaRPr lang="en-US" dirty="0"/>
@@ -1538,6 +1544,7 @@
             <a:r>
               <a:rPr lang="en-US" dirty="0"/>
               <a:t>Follow a program from left to right. You write a source file in assembly or C. The compiler of the RISC-V toolchain turns it into machine code. The result is a cartridge, a file with code, data and a short header. The cartridge is uploaded over the network to a host, and there the runtime calls its three functions. The first three boxes live on your laptop and need level 2; the last two are a host, which can be PRG32-QT, QEMU or the board. The same file runs on all three because it reaches the runtime through a table of functions, the ABI.
+UNDERSTAND NOW: the pieces of PRG32.
 For the lecturer: The compiler is riscv32-esp-elf-gcc, installed by ESP-IDF. The cartridge is loaded at address 0x40800000 and reaches the runtime through a table of functions, the ABI: this is why the same file runs on three different hosts.</a:t>
             </a:r>
             <a:endParaRPr lang="en-US" dirty="0"/>
@@ -1627,6 +1634,7 @@
             <a:r>
               <a:rPr lang="en-US" dirty="0"/>
               <a:t>The kit is a small console built on a breadboard. Its heart is an ESP32-C6, a chip with one RISC-V core at 160 MHz and Wi-Fi. Around it there are a 2.8 inch colour display, one or two audio amplifiers, a joystick and a few buttons, each wired directly to a pin of the chip. Note the two numbers of the screen: the panel has 320 by 240 pixels, and games draw in an area of 320 by 200. A game reaches the board over Wi-Fi. You do not need a kit to follow the course; the laboratory has some.
+UNDERSTAND NOW: the pieces of PRG32.
 For the lecturer: Display: ILI9341 over SPI. Audio: MAX98357A over I2S. The bill of materials and the wiring are in docs/hardware of the PRG32 repository. The laboratory has kits.</a:t>
             </a:r>
             <a:endParaRPr lang="en-US" dirty="0"/>
@@ -1716,6 +1724,7 @@
             <a:r>
               <a:rPr lang="en-US" dirty="0"/>
               <a:t>One cartridge, three hosts. Read the table by rows. On the board and in QEMU your code runs natively, on a real or an emulated chip; in PRG32-QT it is interpreted, one instruction after another. The board and QEMU need the toolchain; PRG32-QT does not, to play and to debug. Stepping through instructions needs extra tools on the first two, and is built into the third. A rule of thumb: use the board when you want the truth about time, and PRG32-QT when you want the truth about a register.
+UNDERSTAND NOW: the pieces of PRG32.
 For the lecturer: Use the board when you want the truth about time, and PRG32-QT when you want the truth about a register. Why an ESP32-C3 in QEMU? Espressif maintains a mature emulator with graphics for that chip; it executes the same RISC-V instructions, and the cartridge does not notice.</a:t>
             </a:r>
             <a:endParaRPr lang="en-US" dirty="0"/>
@@ -1805,6 +1814,7 @@
             <a:r>
               <a:rPr lang="en-US" dirty="0"/>
               <a:t>PRG32-QT is the console as an application: it contains an interpreter of RV32IMAC and offers the cartridge the same functions as the firmware. Three things to remember. The speed profiles in Settings: Accurate, the default, timed like the ESP32-C6; Optimal, thirty frames per second; Unlimited. The Store browser, which downloads and runs published cartridges. And the debugger, which shows assembly, registers and memory and executes one instruction at a time. Accurate is the profile to keep: it tells you when your program would be too slow on the real chip.
+UNDERSTAND NOW: the pieces of PRG32.
 For the lecturer: github.com/riscv-prg32/PRG32-QT. Accurate charges each instruction and each call a cost in cycles of a 160 MHz clock: not a cycle-exact model of the chip, but close enough to see when a frame is late.</a:t>
             </a:r>
             <a:endParaRPr lang="en-US" dirty="0"/>
@@ -1894,6 +1904,7 @@
             <a:r>
               <a:rPr lang="en-US" dirty="0"/>
               <a:t>On a keyboard the joystick is the arrow keys, or W A S D; button A is Z or J; button B is X or K; Start and Select are Enter or Space. In PRG32-QT, Escape leaves the game and returns to Setup. One detail of QEMU surprises everybody the first time: the keys must be typed in the terminal from which QEMU was started, not in the window that shows the picture. If a game in QEMU seems dead, click on the terminal.
+UNDERSTAND NOW: the pieces of PRG32.
 For the lecturer: A USB or Bluetooth game controller is recognised by PRG32-QT when it is plugged in. QEMU reads the keyboard from the terminal that launched it, not from the window with the picture: the classic surprise.</a:t>
             </a:r>
             <a:endParaRPr lang="en-US" dirty="0"/>
@@ -3031,6 +3042,420 @@
       </p:pic>
       <p:sp>
         <p:nvSpPr>
+          <p:cNvPr id="15" name="Shape 12"/>
+          <p:cNvSpPr/>
+          <p:nvPr/>
+        </p:nvSpPr>
+        <p:spPr>
+          <a:xfrm>
+            <a:off x="9690303" y="91440"/>
+            <a:ext cx="1952752" cy="274320"/>
+          </a:xfrm>
+          <a:prstGeom prst="rect">
+            <a:avLst/>
+          </a:prstGeom>
+          <a:solidFill>
+            <a:srgbClr val="F3E8FF"/>
+          </a:solidFill>
+          <a:ln w="12700">
+            <a:solidFill>
+              <a:srgbClr val="7E22CE"/>
+            </a:solidFill>
+            <a:prstDash val="dash"/>
+          </a:ln>
+        </p:spPr>
+      </p:sp>
+      <p:sp>
+        <p:nvSpPr>
+          <p:cNvPr id="16" name="Shape 13"/>
+          <p:cNvSpPr/>
+          <p:nvPr/>
+        </p:nvSpPr>
+        <p:spPr>
+          <a:xfrm>
+            <a:off x="9717735" y="128016"/>
+            <a:ext cx="45720" cy="45720"/>
+          </a:xfrm>
+          <a:prstGeom prst="rect">
+            <a:avLst/>
+          </a:prstGeom>
+          <a:solidFill>
+            <a:srgbClr val="7E22CE"/>
+          </a:solidFill>
+          <a:ln w="12700">
+            <a:solidFill>
+              <a:srgbClr val="7E22CE"/>
+            </a:solidFill>
+            <a:prstDash val="solid"/>
+          </a:ln>
+        </p:spPr>
+      </p:sp>
+      <p:sp>
+        <p:nvSpPr>
+          <p:cNvPr id="17" name="Shape 14"/>
+          <p:cNvSpPr/>
+          <p:nvPr/>
+        </p:nvSpPr>
+        <p:spPr>
+          <a:xfrm>
+            <a:off x="9717735" y="205740"/>
+            <a:ext cx="45720" cy="45720"/>
+          </a:xfrm>
+          <a:prstGeom prst="rect">
+            <a:avLst/>
+          </a:prstGeom>
+          <a:solidFill>
+            <a:srgbClr val="7E22CE"/>
+          </a:solidFill>
+          <a:ln w="12700">
+            <a:solidFill>
+              <a:srgbClr val="7E22CE"/>
+            </a:solidFill>
+            <a:prstDash val="solid"/>
+          </a:ln>
+        </p:spPr>
+      </p:sp>
+      <p:sp>
+        <p:nvSpPr>
+          <p:cNvPr id="18" name="Shape 15"/>
+          <p:cNvSpPr/>
+          <p:nvPr/>
+        </p:nvSpPr>
+        <p:spPr>
+          <a:xfrm>
+            <a:off x="9717735" y="283464"/>
+            <a:ext cx="45720" cy="45720"/>
+          </a:xfrm>
+          <a:prstGeom prst="rect">
+            <a:avLst/>
+          </a:prstGeom>
+          <a:solidFill>
+            <a:srgbClr val="7E22CE"/>
+          </a:solidFill>
+          <a:ln w="12700">
+            <a:solidFill>
+              <a:srgbClr val="7E22CE"/>
+            </a:solidFill>
+            <a:prstDash val="solid"/>
+          </a:ln>
+        </p:spPr>
+      </p:sp>
+      <p:pic>
+        <p:nvPicPr>
+          <p:cNvPr id="19" name="Image 1" descr="preencoded.png">    </p:cNvPr>
+          <p:cNvPicPr>
+            <a:picLocks noChangeAspect="1"/>
+          </p:cNvPicPr>
+          <p:nvPr/>
+        </p:nvPicPr>
+        <p:blipFill>
+          <a:blip r:embed="rId2"/>
+          <a:stretch>
+            <a:fillRect/>
+          </a:stretch>
+        </p:blipFill>
+        <p:spPr>
+          <a:xfrm>
+            <a:off x="9818319" y="128016"/>
+            <a:ext cx="201168" cy="201168"/>
+          </a:xfrm>
+          <a:prstGeom prst="rect">
+            <a:avLst/>
+          </a:prstGeom>
+        </p:spPr>
+      </p:pic>
+      <p:sp>
+        <p:nvSpPr>
+          <p:cNvPr id="20" name="Text 16"/>
+          <p:cNvSpPr txBox="1"/>
+          <p:nvPr/>
+        </p:nvSpPr>
+        <p:spPr>
+          <a:xfrm>
+            <a:off x="10074351" y="91440"/>
+            <a:ext cx="1532128" cy="274320"/>
+          </a:xfrm>
+          <a:prstGeom prst="rect">
+            <a:avLst/>
+          </a:prstGeom>
+          <a:noFill/>
+          <a:ln/>
+        </p:spPr>
+        <p:txBody>
+          <a:bodyPr wrap="square" lIns="0" tIns="0" rIns="0" bIns="0" rtlCol="0" anchor="ctr"/>
+          <a:lstStyle/>
+          <a:p>
+            <a:pPr indent="0" marL="0">
+              <a:buNone/>
+            </a:pPr>
+            <a:r>
+              <a:rPr lang="en-US" sz="1100" b="1" dirty="0">
+                <a:solidFill>
+                  <a:srgbClr val="6B21A8"/>
+                </a:solidFill>
+                <a:latin typeface="Calibri" pitchFamily="34" charset="0"/>
+                <a:ea typeface="Calibri" pitchFamily="34" charset="-122"/>
+                <a:cs typeface="Calibri" pitchFamily="34" charset="-120"/>
+              </a:rPr>
+              <a:t>UNDERSTAND LATER</a:t>
+            </a:r>
+            <a:endParaRPr lang="en-US" sz="1100" dirty="0"/>
+          </a:p>
+        </p:txBody>
+      </p:sp>
+      <p:sp>
+        <p:nvSpPr>
+          <p:cNvPr id="21" name="Shape 17"/>
+          <p:cNvSpPr/>
+          <p:nvPr/>
+        </p:nvSpPr>
+        <p:spPr>
+          <a:xfrm>
+            <a:off x="8407349" y="91440"/>
+            <a:ext cx="1173226" cy="274320"/>
+          </a:xfrm>
+          <a:prstGeom prst="rect">
+            <a:avLst/>
+          </a:prstGeom>
+          <a:solidFill>
+            <a:srgbClr val="FEF3C7"/>
+          </a:solidFill>
+          <a:ln w="12700">
+            <a:solidFill>
+              <a:srgbClr val="B45309"/>
+            </a:solidFill>
+            <a:prstDash val="solid"/>
+          </a:ln>
+        </p:spPr>
+      </p:sp>
+      <p:sp>
+        <p:nvSpPr>
+          <p:cNvPr id="22" name="Shape 18"/>
+          <p:cNvSpPr/>
+          <p:nvPr/>
+        </p:nvSpPr>
+        <p:spPr>
+          <a:xfrm>
+            <a:off x="8407349" y="91440"/>
+            <a:ext cx="27432" cy="274320"/>
+          </a:xfrm>
+          <a:prstGeom prst="rect">
+            <a:avLst/>
+          </a:prstGeom>
+          <a:solidFill>
+            <a:srgbClr val="B45309"/>
+          </a:solidFill>
+          <a:ln w="12700">
+            <a:solidFill>
+              <a:srgbClr val="B45309"/>
+            </a:solidFill>
+            <a:prstDash val="solid"/>
+          </a:ln>
+        </p:spPr>
+      </p:sp>
+      <p:sp>
+        <p:nvSpPr>
+          <p:cNvPr id="23" name="Shape 19"/>
+          <p:cNvSpPr/>
+          <p:nvPr/>
+        </p:nvSpPr>
+        <p:spPr>
+          <a:xfrm>
+            <a:off x="8462213" y="91440"/>
+            <a:ext cx="27432" cy="274320"/>
+          </a:xfrm>
+          <a:prstGeom prst="rect">
+            <a:avLst/>
+          </a:prstGeom>
+          <a:solidFill>
+            <a:srgbClr val="B45309"/>
+          </a:solidFill>
+          <a:ln w="12700">
+            <a:solidFill>
+              <a:srgbClr val="B45309"/>
+            </a:solidFill>
+            <a:prstDash val="solid"/>
+          </a:ln>
+        </p:spPr>
+      </p:sp>
+      <p:pic>
+        <p:nvPicPr>
+          <p:cNvPr id="24" name="Image 2" descr="preencoded.png">    </p:cNvPr>
+          <p:cNvPicPr>
+            <a:picLocks noChangeAspect="1"/>
+          </p:cNvPicPr>
+          <p:nvPr/>
+        </p:nvPicPr>
+        <p:blipFill>
+          <a:blip r:embed="rId3"/>
+          <a:stretch>
+            <a:fillRect/>
+          </a:stretch>
+        </p:blipFill>
+        <p:spPr>
+          <a:xfrm>
+            <a:off x="8535365" y="128016"/>
+            <a:ext cx="201168" cy="201168"/>
+          </a:xfrm>
+          <a:prstGeom prst="rect">
+            <a:avLst/>
+          </a:prstGeom>
+        </p:spPr>
+      </p:pic>
+      <p:sp>
+        <p:nvSpPr>
+          <p:cNvPr id="25" name="Text 20"/>
+          <p:cNvSpPr txBox="1"/>
+          <p:nvPr/>
+        </p:nvSpPr>
+        <p:spPr>
+          <a:xfrm>
+            <a:off x="8791397" y="91440"/>
+            <a:ext cx="752602" cy="274320"/>
+          </a:xfrm>
+          <a:prstGeom prst="rect">
+            <a:avLst/>
+          </a:prstGeom>
+          <a:noFill/>
+          <a:ln/>
+        </p:spPr>
+        <p:txBody>
+          <a:bodyPr wrap="square" lIns="0" tIns="0" rIns="0" bIns="0" rtlCol="0" anchor="ctr"/>
+          <a:lstStyle/>
+          <a:p>
+            <a:pPr indent="0" marL="0">
+              <a:buNone/>
+            </a:pPr>
+            <a:r>
+              <a:rPr lang="en-US" sz="1100" b="1" dirty="0">
+                <a:solidFill>
+                  <a:srgbClr val="92400E"/>
+                </a:solidFill>
+                <a:latin typeface="Calibri" pitchFamily="34" charset="0"/>
+                <a:ea typeface="Calibri" pitchFamily="34" charset="-122"/>
+                <a:cs typeface="Calibri" pitchFamily="34" charset="-120"/>
+              </a:rPr>
+              <a:t>USE NOW</a:t>
+            </a:r>
+            <a:endParaRPr lang="en-US" sz="1100" dirty="0"/>
+          </a:p>
+        </p:txBody>
+      </p:sp>
+      <p:sp>
+        <p:nvSpPr>
+          <p:cNvPr id="26" name="Shape 21"/>
+          <p:cNvSpPr/>
+          <p:nvPr/>
+        </p:nvSpPr>
+        <p:spPr>
+          <a:xfrm>
+            <a:off x="6518097" y="91440"/>
+            <a:ext cx="1779524" cy="274320"/>
+          </a:xfrm>
+          <a:prstGeom prst="rect">
+            <a:avLst/>
+          </a:prstGeom>
+          <a:solidFill>
+            <a:srgbClr val="E0F2FE"/>
+          </a:solidFill>
+          <a:ln w="12700">
+            <a:solidFill>
+              <a:srgbClr val="0369A1"/>
+            </a:solidFill>
+            <a:prstDash val="solid"/>
+          </a:ln>
+        </p:spPr>
+      </p:sp>
+      <p:sp>
+        <p:nvSpPr>
+          <p:cNvPr id="27" name="Shape 22"/>
+          <p:cNvSpPr/>
+          <p:nvPr/>
+        </p:nvSpPr>
+        <p:spPr>
+          <a:xfrm>
+            <a:off x="6518097" y="91440"/>
+            <a:ext cx="73152" cy="274320"/>
+          </a:xfrm>
+          <a:prstGeom prst="rect">
+            <a:avLst/>
+          </a:prstGeom>
+          <a:solidFill>
+            <a:srgbClr val="0369A1"/>
+          </a:solidFill>
+          <a:ln w="12700">
+            <a:solidFill>
+              <a:srgbClr val="0369A1"/>
+            </a:solidFill>
+            <a:prstDash val="solid"/>
+          </a:ln>
+        </p:spPr>
+      </p:sp>
+      <p:pic>
+        <p:nvPicPr>
+          <p:cNvPr id="28" name="Image 3" descr="preencoded.png">    </p:cNvPr>
+          <p:cNvPicPr>
+            <a:picLocks noChangeAspect="1"/>
+          </p:cNvPicPr>
+          <p:nvPr/>
+        </p:nvPicPr>
+        <p:blipFill>
+          <a:blip r:embed="rId4"/>
+          <a:stretch>
+            <a:fillRect/>
+          </a:stretch>
+        </p:blipFill>
+        <p:spPr>
+          <a:xfrm>
+            <a:off x="6646113" y="128016"/>
+            <a:ext cx="201168" cy="201168"/>
+          </a:xfrm>
+          <a:prstGeom prst="rect">
+            <a:avLst/>
+          </a:prstGeom>
+        </p:spPr>
+      </p:pic>
+      <p:sp>
+        <p:nvSpPr>
+          <p:cNvPr id="29" name="Text 23"/>
+          <p:cNvSpPr txBox="1"/>
+          <p:nvPr/>
+        </p:nvSpPr>
+        <p:spPr>
+          <a:xfrm>
+            <a:off x="6902145" y="91440"/>
+            <a:ext cx="1358900" cy="274320"/>
+          </a:xfrm>
+          <a:prstGeom prst="rect">
+            <a:avLst/>
+          </a:prstGeom>
+          <a:noFill/>
+          <a:ln/>
+        </p:spPr>
+        <p:txBody>
+          <a:bodyPr wrap="square" lIns="0" tIns="0" rIns="0" bIns="0" rtlCol="0" anchor="ctr"/>
+          <a:lstStyle/>
+          <a:p>
+            <a:pPr indent="0" marL="0">
+              <a:buNone/>
+            </a:pPr>
+            <a:r>
+              <a:rPr lang="en-US" sz="1100" b="1" dirty="0">
+                <a:solidFill>
+                  <a:srgbClr val="075985"/>
+                </a:solidFill>
+                <a:latin typeface="Calibri" pitchFamily="34" charset="0"/>
+                <a:ea typeface="Calibri" pitchFamily="34" charset="-122"/>
+                <a:cs typeface="Calibri" pitchFamily="34" charset="-120"/>
+              </a:rPr>
+              <a:t>UNDERSTAND NOW</a:t>
+            </a:r>
+            <a:endParaRPr lang="en-US" sz="1100" dirty="0"/>
+          </a:p>
+        </p:txBody>
+      </p:sp>
+      <p:sp>
+        <p:nvSpPr>
           <p:cNvPr id="25" name="Slide Number Placeholder 0"/>
           <p:cNvSpPr>
             <a:spLocks noGrp="1"/>
@@ -3603,6 +4028,158 @@
               <a:t>ESP-IDF is not active in this terminal. Activate it and try again.</a:t>
             </a:r>
             <a:endParaRPr lang="en-US" sz="1900" dirty="0"/>
+          </a:p>
+        </p:txBody>
+      </p:sp>
+      <p:sp>
+        <p:nvSpPr>
+          <p:cNvPr id="16" name="Shape 14"/>
+          <p:cNvSpPr/>
+          <p:nvPr/>
+        </p:nvSpPr>
+        <p:spPr>
+          <a:xfrm>
+            <a:off x="9287967" y="91440"/>
+            <a:ext cx="2355088" cy="274320"/>
+          </a:xfrm>
+          <a:prstGeom prst="rect">
+            <a:avLst/>
+          </a:prstGeom>
+          <a:solidFill>
+            <a:srgbClr val="FEF3C7"/>
+          </a:solidFill>
+          <a:ln w="12700">
+            <a:solidFill>
+              <a:srgbClr val="B45309"/>
+            </a:solidFill>
+            <a:prstDash val="solid"/>
+          </a:ln>
+        </p:spPr>
+      </p:sp>
+      <p:sp>
+        <p:nvSpPr>
+          <p:cNvPr id="17" name="Shape 15"/>
+          <p:cNvSpPr/>
+          <p:nvPr/>
+        </p:nvSpPr>
+        <p:spPr>
+          <a:xfrm>
+            <a:off x="9287967" y="91440"/>
+            <a:ext cx="27432" cy="274320"/>
+          </a:xfrm>
+          <a:prstGeom prst="rect">
+            <a:avLst/>
+          </a:prstGeom>
+          <a:solidFill>
+            <a:srgbClr val="B45309"/>
+          </a:solidFill>
+          <a:ln w="12700">
+            <a:solidFill>
+              <a:srgbClr val="B45309"/>
+            </a:solidFill>
+            <a:prstDash val="solid"/>
+          </a:ln>
+        </p:spPr>
+      </p:sp>
+      <p:sp>
+        <p:nvSpPr>
+          <p:cNvPr id="18" name="Shape 16"/>
+          <p:cNvSpPr/>
+          <p:nvPr/>
+        </p:nvSpPr>
+        <p:spPr>
+          <a:xfrm>
+            <a:off x="9342831" y="91440"/>
+            <a:ext cx="27432" cy="274320"/>
+          </a:xfrm>
+          <a:prstGeom prst="rect">
+            <a:avLst/>
+          </a:prstGeom>
+          <a:solidFill>
+            <a:srgbClr val="B45309"/>
+          </a:solidFill>
+          <a:ln w="12700">
+            <a:solidFill>
+              <a:srgbClr val="B45309"/>
+            </a:solidFill>
+            <a:prstDash val="solid"/>
+          </a:ln>
+        </p:spPr>
+      </p:sp>
+      <p:pic>
+        <p:nvPicPr>
+          <p:cNvPr id="19" name="Image 0" descr="preencoded.png">    </p:cNvPr>
+          <p:cNvPicPr>
+            <a:picLocks noChangeAspect="1"/>
+          </p:cNvPicPr>
+          <p:nvPr/>
+        </p:nvPicPr>
+        <p:blipFill>
+          <a:blip r:embed="rId1"/>
+          <a:stretch>
+            <a:fillRect/>
+          </a:stretch>
+        </p:blipFill>
+        <p:spPr>
+          <a:xfrm>
+            <a:off x="9415983" y="128016"/>
+            <a:ext cx="201168" cy="201168"/>
+          </a:xfrm>
+          <a:prstGeom prst="rect">
+            <a:avLst/>
+          </a:prstGeom>
+        </p:spPr>
+      </p:pic>
+      <p:sp>
+        <p:nvSpPr>
+          <p:cNvPr id="20" name="Text 17"/>
+          <p:cNvSpPr txBox="1"/>
+          <p:nvPr/>
+        </p:nvSpPr>
+        <p:spPr>
+          <a:xfrm>
+            <a:off x="9672015" y="91440"/>
+            <a:ext cx="1934464" cy="274320"/>
+          </a:xfrm>
+          <a:prstGeom prst="rect">
+            <a:avLst/>
+          </a:prstGeom>
+          <a:noFill/>
+          <a:ln/>
+        </p:spPr>
+        <p:txBody>
+          <a:bodyPr wrap="square" lIns="0" tIns="0" rIns="0" bIns="0" rtlCol="0" anchor="ctr"/>
+          <a:lstStyle/>
+          <a:p>
+            <a:pPr indent="0" marL="0">
+              <a:buNone/>
+            </a:pPr>
+            <a:r>
+              <a:rPr lang="en-US" sz="1100" b="1" dirty="0">
+                <a:solidFill>
+                  <a:srgbClr val="92400E"/>
+                </a:solidFill>
+                <a:latin typeface="Calibri" pitchFamily="34" charset="0"/>
+                <a:ea typeface="Calibri" pitchFamily="34" charset="-122"/>
+                <a:cs typeface="Calibri" pitchFamily="34" charset="-120"/>
+              </a:rPr>
+              <a:t>USE NOW</a:t>
+            </a:r>
+            <a:pPr indent="0" marL="0">
+              <a:buNone/>
+            </a:pPr>
+            <a:r>
+              <a:rPr lang="en-US" sz="1100" dirty="0">
+                <a:solidFill>
+                  <a:srgbClr val="92400E"/>
+                </a:solidFill>
+                <a:latin typeface="Calibri" pitchFamily="34" charset="0"/>
+                <a:ea typeface="Calibri" pitchFamily="34" charset="-122"/>
+                <a:cs typeface="Calibri" pitchFamily="34" charset="-120"/>
+              </a:rPr>
+              <a:t> · the PRG32 tools</a:t>
+            </a:r>
+            <a:endParaRPr lang="en-US" sz="1100" dirty="0"/>
           </a:p>
         </p:txBody>
       </p:sp>
@@ -5399,6 +5976,158 @@
           </a:graphicData>
         </a:graphic>
       </p:graphicFrame>
+      <p:sp>
+        <p:nvSpPr>
+          <p:cNvPr id="4" name="Shape 1"/>
+          <p:cNvSpPr/>
+          <p:nvPr/>
+        </p:nvSpPr>
+        <p:spPr>
+          <a:xfrm>
+            <a:off x="9287967" y="91440"/>
+            <a:ext cx="2355088" cy="274320"/>
+          </a:xfrm>
+          <a:prstGeom prst="rect">
+            <a:avLst/>
+          </a:prstGeom>
+          <a:solidFill>
+            <a:srgbClr val="FEF3C7"/>
+          </a:solidFill>
+          <a:ln w="12700">
+            <a:solidFill>
+              <a:srgbClr val="B45309"/>
+            </a:solidFill>
+            <a:prstDash val="solid"/>
+          </a:ln>
+        </p:spPr>
+      </p:sp>
+      <p:sp>
+        <p:nvSpPr>
+          <p:cNvPr id="5" name="Shape 2"/>
+          <p:cNvSpPr/>
+          <p:nvPr/>
+        </p:nvSpPr>
+        <p:spPr>
+          <a:xfrm>
+            <a:off x="9287967" y="91440"/>
+            <a:ext cx="27432" cy="274320"/>
+          </a:xfrm>
+          <a:prstGeom prst="rect">
+            <a:avLst/>
+          </a:prstGeom>
+          <a:solidFill>
+            <a:srgbClr val="B45309"/>
+          </a:solidFill>
+          <a:ln w="12700">
+            <a:solidFill>
+              <a:srgbClr val="B45309"/>
+            </a:solidFill>
+            <a:prstDash val="solid"/>
+          </a:ln>
+        </p:spPr>
+      </p:sp>
+      <p:sp>
+        <p:nvSpPr>
+          <p:cNvPr id="6" name="Shape 3"/>
+          <p:cNvSpPr/>
+          <p:nvPr/>
+        </p:nvSpPr>
+        <p:spPr>
+          <a:xfrm>
+            <a:off x="9342831" y="91440"/>
+            <a:ext cx="27432" cy="274320"/>
+          </a:xfrm>
+          <a:prstGeom prst="rect">
+            <a:avLst/>
+          </a:prstGeom>
+          <a:solidFill>
+            <a:srgbClr val="B45309"/>
+          </a:solidFill>
+          <a:ln w="12700">
+            <a:solidFill>
+              <a:srgbClr val="B45309"/>
+            </a:solidFill>
+            <a:prstDash val="solid"/>
+          </a:ln>
+        </p:spPr>
+      </p:sp>
+      <p:pic>
+        <p:nvPicPr>
+          <p:cNvPr id="7" name="Image 0" descr="preencoded.png">    </p:cNvPr>
+          <p:cNvPicPr>
+            <a:picLocks noChangeAspect="1"/>
+          </p:cNvPicPr>
+          <p:nvPr/>
+        </p:nvPicPr>
+        <p:blipFill>
+          <a:blip r:embed="rId1"/>
+          <a:stretch>
+            <a:fillRect/>
+          </a:stretch>
+        </p:blipFill>
+        <p:spPr>
+          <a:xfrm>
+            <a:off x="9415983" y="128016"/>
+            <a:ext cx="201168" cy="201168"/>
+          </a:xfrm>
+          <a:prstGeom prst="rect">
+            <a:avLst/>
+          </a:prstGeom>
+        </p:spPr>
+      </p:pic>
+      <p:sp>
+        <p:nvSpPr>
+          <p:cNvPr id="8" name="Text 4"/>
+          <p:cNvSpPr txBox="1"/>
+          <p:nvPr/>
+        </p:nvSpPr>
+        <p:spPr>
+          <a:xfrm>
+            <a:off x="9672015" y="91440"/>
+            <a:ext cx="1934464" cy="274320"/>
+          </a:xfrm>
+          <a:prstGeom prst="rect">
+            <a:avLst/>
+          </a:prstGeom>
+          <a:noFill/>
+          <a:ln/>
+        </p:spPr>
+        <p:txBody>
+          <a:bodyPr wrap="square" lIns="0" tIns="0" rIns="0" bIns="0" rtlCol="0" anchor="ctr"/>
+          <a:lstStyle/>
+          <a:p>
+            <a:pPr indent="0" marL="0">
+              <a:buNone/>
+            </a:pPr>
+            <a:r>
+              <a:rPr lang="en-US" sz="1100" b="1" dirty="0">
+                <a:solidFill>
+                  <a:srgbClr val="92400E"/>
+                </a:solidFill>
+                <a:latin typeface="Calibri" pitchFamily="34" charset="0"/>
+                <a:ea typeface="Calibri" pitchFamily="34" charset="-122"/>
+                <a:cs typeface="Calibri" pitchFamily="34" charset="-120"/>
+              </a:rPr>
+              <a:t>USE NOW</a:t>
+            </a:r>
+            <a:pPr indent="0" marL="0">
+              <a:buNone/>
+            </a:pPr>
+            <a:r>
+              <a:rPr lang="en-US" sz="1100" dirty="0">
+                <a:solidFill>
+                  <a:srgbClr val="92400E"/>
+                </a:solidFill>
+                <a:latin typeface="Calibri" pitchFamily="34" charset="0"/>
+                <a:ea typeface="Calibri" pitchFamily="34" charset="-122"/>
+                <a:cs typeface="Calibri" pitchFamily="34" charset="-120"/>
+              </a:rPr>
+              <a:t> · the PRG32 tools</a:t>
+            </a:r>
+            <a:endParaRPr lang="en-US" sz="1100" dirty="0"/>
+          </a:p>
+        </p:txBody>
+      </p:sp>
       <p:sp>
         <p:nvSpPr>
           <p:cNvPr id="25" name="Slide Number Placeholder 0"/>
@@ -13504,6 +14233,133 @@
       </p:sp>
       <p:sp>
         <p:nvSpPr>
+          <p:cNvPr id="13" name="Shape 10"/>
+          <p:cNvSpPr/>
+          <p:nvPr/>
+        </p:nvSpPr>
+        <p:spPr>
+          <a:xfrm>
+            <a:off x="8419033" y="91440"/>
+            <a:ext cx="3224022" cy="274320"/>
+          </a:xfrm>
+          <a:prstGeom prst="rect">
+            <a:avLst/>
+          </a:prstGeom>
+          <a:solidFill>
+            <a:srgbClr val="E0F2FE"/>
+          </a:solidFill>
+          <a:ln w="12700">
+            <a:solidFill>
+              <a:srgbClr val="0369A1"/>
+            </a:solidFill>
+            <a:prstDash val="solid"/>
+          </a:ln>
+        </p:spPr>
+      </p:sp>
+      <p:sp>
+        <p:nvSpPr>
+          <p:cNvPr id="14" name="Shape 11"/>
+          <p:cNvSpPr/>
+          <p:nvPr/>
+        </p:nvSpPr>
+        <p:spPr>
+          <a:xfrm>
+            <a:off x="8419033" y="91440"/>
+            <a:ext cx="73152" cy="274320"/>
+          </a:xfrm>
+          <a:prstGeom prst="rect">
+            <a:avLst/>
+          </a:prstGeom>
+          <a:solidFill>
+            <a:srgbClr val="0369A1"/>
+          </a:solidFill>
+          <a:ln w="12700">
+            <a:solidFill>
+              <a:srgbClr val="0369A1"/>
+            </a:solidFill>
+            <a:prstDash val="solid"/>
+          </a:ln>
+        </p:spPr>
+      </p:sp>
+      <p:pic>
+        <p:nvPicPr>
+          <p:cNvPr id="15" name="Image 1" descr="preencoded.png">    </p:cNvPr>
+          <p:cNvPicPr>
+            <a:picLocks noChangeAspect="1"/>
+          </p:cNvPicPr>
+          <p:nvPr/>
+        </p:nvPicPr>
+        <p:blipFill>
+          <a:blip r:embed="rId2"/>
+          <a:stretch>
+            <a:fillRect/>
+          </a:stretch>
+        </p:blipFill>
+        <p:spPr>
+          <a:xfrm>
+            <a:off x="8547049" y="128016"/>
+            <a:ext cx="201168" cy="201168"/>
+          </a:xfrm>
+          <a:prstGeom prst="rect">
+            <a:avLst/>
+          </a:prstGeom>
+        </p:spPr>
+      </p:pic>
+      <p:sp>
+        <p:nvSpPr>
+          <p:cNvPr id="16" name="Text 12"/>
+          <p:cNvSpPr txBox="1"/>
+          <p:nvPr/>
+        </p:nvSpPr>
+        <p:spPr>
+          <a:xfrm>
+            <a:off x="8803081" y="91440"/>
+            <a:ext cx="2803398" cy="274320"/>
+          </a:xfrm>
+          <a:prstGeom prst="rect">
+            <a:avLst/>
+          </a:prstGeom>
+          <a:noFill/>
+          <a:ln/>
+        </p:spPr>
+        <p:txBody>
+          <a:bodyPr wrap="square" lIns="0" tIns="0" rIns="0" bIns="0" rtlCol="0" anchor="ctr"/>
+          <a:lstStyle/>
+          <a:p>
+            <a:pPr indent="0" marL="0">
+              <a:buNone/>
+            </a:pPr>
+            <a:r>
+              <a:rPr lang="en-US" sz="1100" b="1" dirty="0">
+                <a:solidFill>
+                  <a:srgbClr val="075985"/>
+                </a:solidFill>
+                <a:latin typeface="Calibri" pitchFamily="34" charset="0"/>
+                <a:ea typeface="Calibri" pitchFamily="34" charset="-122"/>
+                <a:cs typeface="Calibri" pitchFamily="34" charset="-120"/>
+              </a:rPr>
+              <a:t>UNDERSTAND NOW</a:t>
+            </a:r>
+            <a:pPr indent="0" marL="0">
+              <a:buNone/>
+            </a:pPr>
+            <a:r>
+              <a:rPr lang="en-US" sz="1100" dirty="0">
+                <a:solidFill>
+                  <a:srgbClr val="075985"/>
+                </a:solidFill>
+                <a:latin typeface="Calibri" pitchFamily="34" charset="0"/>
+                <a:ea typeface="Calibri" pitchFamily="34" charset="-122"/>
+                <a:cs typeface="Calibri" pitchFamily="34" charset="-120"/>
+              </a:rPr>
+              <a:t> · the pieces of PRG32</a:t>
+            </a:r>
+            <a:endParaRPr lang="en-US" sz="1100" dirty="0"/>
+          </a:p>
+        </p:txBody>
+      </p:sp>
+      <p:sp>
+        <p:nvSpPr>
           <p:cNvPr id="25" name="Slide Number Placeholder 0"/>
           <p:cNvSpPr>
             <a:spLocks noGrp="1"/>
@@ -14349,6 +15205,133 @@
       </p:sp>
       <p:sp>
         <p:nvSpPr>
+          <p:cNvPr id="24" name="Shape 22"/>
+          <p:cNvSpPr/>
+          <p:nvPr/>
+        </p:nvSpPr>
+        <p:spPr>
+          <a:xfrm>
+            <a:off x="8419033" y="91440"/>
+            <a:ext cx="3224022" cy="274320"/>
+          </a:xfrm>
+          <a:prstGeom prst="rect">
+            <a:avLst/>
+          </a:prstGeom>
+          <a:solidFill>
+            <a:srgbClr val="E0F2FE"/>
+          </a:solidFill>
+          <a:ln w="12700">
+            <a:solidFill>
+              <a:srgbClr val="0369A1"/>
+            </a:solidFill>
+            <a:prstDash val="solid"/>
+          </a:ln>
+        </p:spPr>
+      </p:sp>
+      <p:sp>
+        <p:nvSpPr>
+          <p:cNvPr id="25" name="Shape 23"/>
+          <p:cNvSpPr/>
+          <p:nvPr/>
+        </p:nvSpPr>
+        <p:spPr>
+          <a:xfrm>
+            <a:off x="8419033" y="91440"/>
+            <a:ext cx="73152" cy="274320"/>
+          </a:xfrm>
+          <a:prstGeom prst="rect">
+            <a:avLst/>
+          </a:prstGeom>
+          <a:solidFill>
+            <a:srgbClr val="0369A1"/>
+          </a:solidFill>
+          <a:ln w="12700">
+            <a:solidFill>
+              <a:srgbClr val="0369A1"/>
+            </a:solidFill>
+            <a:prstDash val="solid"/>
+          </a:ln>
+        </p:spPr>
+      </p:sp>
+      <p:pic>
+        <p:nvPicPr>
+          <p:cNvPr id="26" name="Image 0" descr="preencoded.png">    </p:cNvPr>
+          <p:cNvPicPr>
+            <a:picLocks noChangeAspect="1"/>
+          </p:cNvPicPr>
+          <p:nvPr/>
+        </p:nvPicPr>
+        <p:blipFill>
+          <a:blip r:embed="rId1"/>
+          <a:stretch>
+            <a:fillRect/>
+          </a:stretch>
+        </p:blipFill>
+        <p:spPr>
+          <a:xfrm>
+            <a:off x="8547049" y="128016"/>
+            <a:ext cx="201168" cy="201168"/>
+          </a:xfrm>
+          <a:prstGeom prst="rect">
+            <a:avLst/>
+          </a:prstGeom>
+        </p:spPr>
+      </p:pic>
+      <p:sp>
+        <p:nvSpPr>
+          <p:cNvPr id="27" name="Text 24"/>
+          <p:cNvSpPr txBox="1"/>
+          <p:nvPr/>
+        </p:nvSpPr>
+        <p:spPr>
+          <a:xfrm>
+            <a:off x="8803081" y="91440"/>
+            <a:ext cx="2803398" cy="274320"/>
+          </a:xfrm>
+          <a:prstGeom prst="rect">
+            <a:avLst/>
+          </a:prstGeom>
+          <a:noFill/>
+          <a:ln/>
+        </p:spPr>
+        <p:txBody>
+          <a:bodyPr wrap="square" lIns="0" tIns="0" rIns="0" bIns="0" rtlCol="0" anchor="ctr"/>
+          <a:lstStyle/>
+          <a:p>
+            <a:pPr indent="0" marL="0">
+              <a:buNone/>
+            </a:pPr>
+            <a:r>
+              <a:rPr lang="en-US" sz="1100" b="1" dirty="0">
+                <a:solidFill>
+                  <a:srgbClr val="075985"/>
+                </a:solidFill>
+                <a:latin typeface="Calibri" pitchFamily="34" charset="0"/>
+                <a:ea typeface="Calibri" pitchFamily="34" charset="-122"/>
+                <a:cs typeface="Calibri" pitchFamily="34" charset="-120"/>
+              </a:rPr>
+              <a:t>UNDERSTAND NOW</a:t>
+            </a:r>
+            <a:pPr indent="0" marL="0">
+              <a:buNone/>
+            </a:pPr>
+            <a:r>
+              <a:rPr lang="en-US" sz="1100" dirty="0">
+                <a:solidFill>
+                  <a:srgbClr val="075985"/>
+                </a:solidFill>
+                <a:latin typeface="Calibri" pitchFamily="34" charset="0"/>
+                <a:ea typeface="Calibri" pitchFamily="34" charset="-122"/>
+                <a:cs typeface="Calibri" pitchFamily="34" charset="-120"/>
+              </a:rPr>
+              <a:t> · the pieces of PRG32</a:t>
+            </a:r>
+            <a:endParaRPr lang="en-US" sz="1100" dirty="0"/>
+          </a:p>
+        </p:txBody>
+      </p:sp>
+      <p:sp>
+        <p:nvSpPr>
           <p:cNvPr id="25" name="Slide Number Placeholder 0"/>
           <p:cNvSpPr>
             <a:spLocks noGrp="1"/>
@@ -14856,6 +15839,133 @@
               <a:t>The PRG32 kit on a breadboard</a:t>
             </a:r>
             <a:endParaRPr lang="en-US" sz="1200" dirty="0"/>
+          </a:p>
+        </p:txBody>
+      </p:sp>
+      <p:sp>
+        <p:nvSpPr>
+          <p:cNvPr id="15" name="Shape 12"/>
+          <p:cNvSpPr/>
+          <p:nvPr/>
+        </p:nvSpPr>
+        <p:spPr>
+          <a:xfrm>
+            <a:off x="8419033" y="91440"/>
+            <a:ext cx="3224022" cy="274320"/>
+          </a:xfrm>
+          <a:prstGeom prst="rect">
+            <a:avLst/>
+          </a:prstGeom>
+          <a:solidFill>
+            <a:srgbClr val="E0F2FE"/>
+          </a:solidFill>
+          <a:ln w="12700">
+            <a:solidFill>
+              <a:srgbClr val="0369A1"/>
+            </a:solidFill>
+            <a:prstDash val="solid"/>
+          </a:ln>
+        </p:spPr>
+      </p:sp>
+      <p:sp>
+        <p:nvSpPr>
+          <p:cNvPr id="16" name="Shape 13"/>
+          <p:cNvSpPr/>
+          <p:nvPr/>
+        </p:nvSpPr>
+        <p:spPr>
+          <a:xfrm>
+            <a:off x="8419033" y="91440"/>
+            <a:ext cx="73152" cy="274320"/>
+          </a:xfrm>
+          <a:prstGeom prst="rect">
+            <a:avLst/>
+          </a:prstGeom>
+          <a:solidFill>
+            <a:srgbClr val="0369A1"/>
+          </a:solidFill>
+          <a:ln w="12700">
+            <a:solidFill>
+              <a:srgbClr val="0369A1"/>
+            </a:solidFill>
+            <a:prstDash val="solid"/>
+          </a:ln>
+        </p:spPr>
+      </p:sp>
+      <p:pic>
+        <p:nvPicPr>
+          <p:cNvPr id="17" name="Image 1" descr="preencoded.png">    </p:cNvPr>
+          <p:cNvPicPr>
+            <a:picLocks noChangeAspect="1"/>
+          </p:cNvPicPr>
+          <p:nvPr/>
+        </p:nvPicPr>
+        <p:blipFill>
+          <a:blip r:embed="rId2"/>
+          <a:stretch>
+            <a:fillRect/>
+          </a:stretch>
+        </p:blipFill>
+        <p:spPr>
+          <a:xfrm>
+            <a:off x="8547049" y="128016"/>
+            <a:ext cx="201168" cy="201168"/>
+          </a:xfrm>
+          <a:prstGeom prst="rect">
+            <a:avLst/>
+          </a:prstGeom>
+        </p:spPr>
+      </p:pic>
+      <p:sp>
+        <p:nvSpPr>
+          <p:cNvPr id="18" name="Text 14"/>
+          <p:cNvSpPr txBox="1"/>
+          <p:nvPr/>
+        </p:nvSpPr>
+        <p:spPr>
+          <a:xfrm>
+            <a:off x="8803081" y="91440"/>
+            <a:ext cx="2803398" cy="274320"/>
+          </a:xfrm>
+          <a:prstGeom prst="rect">
+            <a:avLst/>
+          </a:prstGeom>
+          <a:noFill/>
+          <a:ln/>
+        </p:spPr>
+        <p:txBody>
+          <a:bodyPr wrap="square" lIns="0" tIns="0" rIns="0" bIns="0" rtlCol="0" anchor="ctr"/>
+          <a:lstStyle/>
+          <a:p>
+            <a:pPr indent="0" marL="0">
+              <a:buNone/>
+            </a:pPr>
+            <a:r>
+              <a:rPr lang="en-US" sz="1100" b="1" dirty="0">
+                <a:solidFill>
+                  <a:srgbClr val="075985"/>
+                </a:solidFill>
+                <a:latin typeface="Calibri" pitchFamily="34" charset="0"/>
+                <a:ea typeface="Calibri" pitchFamily="34" charset="-122"/>
+                <a:cs typeface="Calibri" pitchFamily="34" charset="-120"/>
+              </a:rPr>
+              <a:t>UNDERSTAND NOW</a:t>
+            </a:r>
+            <a:pPr indent="0" marL="0">
+              <a:buNone/>
+            </a:pPr>
+            <a:r>
+              <a:rPr lang="en-US" sz="1100" dirty="0">
+                <a:solidFill>
+                  <a:srgbClr val="075985"/>
+                </a:solidFill>
+                <a:latin typeface="Calibri" pitchFamily="34" charset="0"/>
+                <a:ea typeface="Calibri" pitchFamily="34" charset="-122"/>
+                <a:cs typeface="Calibri" pitchFamily="34" charset="-120"/>
+              </a:rPr>
+              <a:t> · the pieces of PRG32</a:t>
+            </a:r>
+            <a:endParaRPr lang="en-US" sz="1100" dirty="0"/>
           </a:p>
         </p:txBody>
       </p:sp>
@@ -16674,6 +17784,133 @@
               <a:t>The cartridge file is the same in every column.</a:t>
             </a:r>
             <a:endParaRPr lang="en-US" sz="1500" dirty="0"/>
+          </a:p>
+        </p:txBody>
+      </p:sp>
+      <p:sp>
+        <p:nvSpPr>
+          <p:cNvPr id="5" name="Shape 2"/>
+          <p:cNvSpPr/>
+          <p:nvPr/>
+        </p:nvSpPr>
+        <p:spPr>
+          <a:xfrm>
+            <a:off x="8419033" y="91440"/>
+            <a:ext cx="3224022" cy="274320"/>
+          </a:xfrm>
+          <a:prstGeom prst="rect">
+            <a:avLst/>
+          </a:prstGeom>
+          <a:solidFill>
+            <a:srgbClr val="E0F2FE"/>
+          </a:solidFill>
+          <a:ln w="12700">
+            <a:solidFill>
+              <a:srgbClr val="0369A1"/>
+            </a:solidFill>
+            <a:prstDash val="solid"/>
+          </a:ln>
+        </p:spPr>
+      </p:sp>
+      <p:sp>
+        <p:nvSpPr>
+          <p:cNvPr id="6" name="Shape 3"/>
+          <p:cNvSpPr/>
+          <p:nvPr/>
+        </p:nvSpPr>
+        <p:spPr>
+          <a:xfrm>
+            <a:off x="8419033" y="91440"/>
+            <a:ext cx="73152" cy="274320"/>
+          </a:xfrm>
+          <a:prstGeom prst="rect">
+            <a:avLst/>
+          </a:prstGeom>
+          <a:solidFill>
+            <a:srgbClr val="0369A1"/>
+          </a:solidFill>
+          <a:ln w="12700">
+            <a:solidFill>
+              <a:srgbClr val="0369A1"/>
+            </a:solidFill>
+            <a:prstDash val="solid"/>
+          </a:ln>
+        </p:spPr>
+      </p:sp>
+      <p:pic>
+        <p:nvPicPr>
+          <p:cNvPr id="7" name="Image 0" descr="preencoded.png">    </p:cNvPr>
+          <p:cNvPicPr>
+            <a:picLocks noChangeAspect="1"/>
+          </p:cNvPicPr>
+          <p:nvPr/>
+        </p:nvPicPr>
+        <p:blipFill>
+          <a:blip r:embed="rId1"/>
+          <a:stretch>
+            <a:fillRect/>
+          </a:stretch>
+        </p:blipFill>
+        <p:spPr>
+          <a:xfrm>
+            <a:off x="8547049" y="128016"/>
+            <a:ext cx="201168" cy="201168"/>
+          </a:xfrm>
+          <a:prstGeom prst="rect">
+            <a:avLst/>
+          </a:prstGeom>
+        </p:spPr>
+      </p:pic>
+      <p:sp>
+        <p:nvSpPr>
+          <p:cNvPr id="8" name="Text 4"/>
+          <p:cNvSpPr txBox="1"/>
+          <p:nvPr/>
+        </p:nvSpPr>
+        <p:spPr>
+          <a:xfrm>
+            <a:off x="8803081" y="91440"/>
+            <a:ext cx="2803398" cy="274320"/>
+          </a:xfrm>
+          <a:prstGeom prst="rect">
+            <a:avLst/>
+          </a:prstGeom>
+          <a:noFill/>
+          <a:ln/>
+        </p:spPr>
+        <p:txBody>
+          <a:bodyPr wrap="square" lIns="0" tIns="0" rIns="0" bIns="0" rtlCol="0" anchor="ctr"/>
+          <a:lstStyle/>
+          <a:p>
+            <a:pPr indent="0" marL="0">
+              <a:buNone/>
+            </a:pPr>
+            <a:r>
+              <a:rPr lang="en-US" sz="1100" b="1" dirty="0">
+                <a:solidFill>
+                  <a:srgbClr val="075985"/>
+                </a:solidFill>
+                <a:latin typeface="Calibri" pitchFamily="34" charset="0"/>
+                <a:ea typeface="Calibri" pitchFamily="34" charset="-122"/>
+                <a:cs typeface="Calibri" pitchFamily="34" charset="-120"/>
+              </a:rPr>
+              <a:t>UNDERSTAND NOW</a:t>
+            </a:r>
+            <a:pPr indent="0" marL="0">
+              <a:buNone/>
+            </a:pPr>
+            <a:r>
+              <a:rPr lang="en-US" sz="1100" dirty="0">
+                <a:solidFill>
+                  <a:srgbClr val="075985"/>
+                </a:solidFill>
+                <a:latin typeface="Calibri" pitchFamily="34" charset="0"/>
+                <a:ea typeface="Calibri" pitchFamily="34" charset="-122"/>
+                <a:cs typeface="Calibri" pitchFamily="34" charset="-120"/>
+              </a:rPr>
+              <a:t> · the pieces of PRG32</a:t>
+            </a:r>
+            <a:endParaRPr lang="en-US" sz="1100" dirty="0"/>
           </a:p>
         </p:txBody>
       </p:sp>
@@ -17251,6 +18488,133 @@
       </p:sp>
       <p:sp>
         <p:nvSpPr>
+          <p:cNvPr id="15" name="Shape 12"/>
+          <p:cNvSpPr/>
+          <p:nvPr/>
+        </p:nvSpPr>
+        <p:spPr>
+          <a:xfrm>
+            <a:off x="8419033" y="91440"/>
+            <a:ext cx="3224022" cy="274320"/>
+          </a:xfrm>
+          <a:prstGeom prst="rect">
+            <a:avLst/>
+          </a:prstGeom>
+          <a:solidFill>
+            <a:srgbClr val="E0F2FE"/>
+          </a:solidFill>
+          <a:ln w="12700">
+            <a:solidFill>
+              <a:srgbClr val="0369A1"/>
+            </a:solidFill>
+            <a:prstDash val="solid"/>
+          </a:ln>
+        </p:spPr>
+      </p:sp>
+      <p:sp>
+        <p:nvSpPr>
+          <p:cNvPr id="16" name="Shape 13"/>
+          <p:cNvSpPr/>
+          <p:nvPr/>
+        </p:nvSpPr>
+        <p:spPr>
+          <a:xfrm>
+            <a:off x="8419033" y="91440"/>
+            <a:ext cx="73152" cy="274320"/>
+          </a:xfrm>
+          <a:prstGeom prst="rect">
+            <a:avLst/>
+          </a:prstGeom>
+          <a:solidFill>
+            <a:srgbClr val="0369A1"/>
+          </a:solidFill>
+          <a:ln w="12700">
+            <a:solidFill>
+              <a:srgbClr val="0369A1"/>
+            </a:solidFill>
+            <a:prstDash val="solid"/>
+          </a:ln>
+        </p:spPr>
+      </p:sp>
+      <p:pic>
+        <p:nvPicPr>
+          <p:cNvPr id="17" name="Image 1" descr="preencoded.png">    </p:cNvPr>
+          <p:cNvPicPr>
+            <a:picLocks noChangeAspect="1"/>
+          </p:cNvPicPr>
+          <p:nvPr/>
+        </p:nvPicPr>
+        <p:blipFill>
+          <a:blip r:embed="rId2"/>
+          <a:stretch>
+            <a:fillRect/>
+          </a:stretch>
+        </p:blipFill>
+        <p:spPr>
+          <a:xfrm>
+            <a:off x="8547049" y="128016"/>
+            <a:ext cx="201168" cy="201168"/>
+          </a:xfrm>
+          <a:prstGeom prst="rect">
+            <a:avLst/>
+          </a:prstGeom>
+        </p:spPr>
+      </p:pic>
+      <p:sp>
+        <p:nvSpPr>
+          <p:cNvPr id="18" name="Text 14"/>
+          <p:cNvSpPr txBox="1"/>
+          <p:nvPr/>
+        </p:nvSpPr>
+        <p:spPr>
+          <a:xfrm>
+            <a:off x="8803081" y="91440"/>
+            <a:ext cx="2803398" cy="274320"/>
+          </a:xfrm>
+          <a:prstGeom prst="rect">
+            <a:avLst/>
+          </a:prstGeom>
+          <a:noFill/>
+          <a:ln/>
+        </p:spPr>
+        <p:txBody>
+          <a:bodyPr wrap="square" lIns="0" tIns="0" rIns="0" bIns="0" rtlCol="0" anchor="ctr"/>
+          <a:lstStyle/>
+          <a:p>
+            <a:pPr indent="0" marL="0">
+              <a:buNone/>
+            </a:pPr>
+            <a:r>
+              <a:rPr lang="en-US" sz="1100" b="1" dirty="0">
+                <a:solidFill>
+                  <a:srgbClr val="075985"/>
+                </a:solidFill>
+                <a:latin typeface="Calibri" pitchFamily="34" charset="0"/>
+                <a:ea typeface="Calibri" pitchFamily="34" charset="-122"/>
+                <a:cs typeface="Calibri" pitchFamily="34" charset="-120"/>
+              </a:rPr>
+              <a:t>UNDERSTAND NOW</a:t>
+            </a:r>
+            <a:pPr indent="0" marL="0">
+              <a:buNone/>
+            </a:pPr>
+            <a:r>
+              <a:rPr lang="en-US" sz="1100" dirty="0">
+                <a:solidFill>
+                  <a:srgbClr val="075985"/>
+                </a:solidFill>
+                <a:latin typeface="Calibri" pitchFamily="34" charset="0"/>
+                <a:ea typeface="Calibri" pitchFamily="34" charset="-122"/>
+                <a:cs typeface="Calibri" pitchFamily="34" charset="-120"/>
+              </a:rPr>
+              <a:t> · the pieces of PRG32</a:t>
+            </a:r>
+            <a:endParaRPr lang="en-US" sz="1100" dirty="0"/>
+          </a:p>
+        </p:txBody>
+      </p:sp>
+      <p:sp>
+        <p:nvSpPr>
           <p:cNvPr id="25" name="Slide Number Placeholder 0"/>
           <p:cNvSpPr>
             <a:spLocks noGrp="1"/>
@@ -18630,6 +19994,133 @@
           </a:graphicData>
         </a:graphic>
       </p:graphicFrame>
+      <p:sp>
+        <p:nvSpPr>
+          <p:cNvPr id="4" name="Shape 1"/>
+          <p:cNvSpPr/>
+          <p:nvPr/>
+        </p:nvSpPr>
+        <p:spPr>
+          <a:xfrm>
+            <a:off x="8419033" y="91440"/>
+            <a:ext cx="3224022" cy="274320"/>
+          </a:xfrm>
+          <a:prstGeom prst="rect">
+            <a:avLst/>
+          </a:prstGeom>
+          <a:solidFill>
+            <a:srgbClr val="E0F2FE"/>
+          </a:solidFill>
+          <a:ln w="12700">
+            <a:solidFill>
+              <a:srgbClr val="0369A1"/>
+            </a:solidFill>
+            <a:prstDash val="solid"/>
+          </a:ln>
+        </p:spPr>
+      </p:sp>
+      <p:sp>
+        <p:nvSpPr>
+          <p:cNvPr id="5" name="Shape 2"/>
+          <p:cNvSpPr/>
+          <p:nvPr/>
+        </p:nvSpPr>
+        <p:spPr>
+          <a:xfrm>
+            <a:off x="8419033" y="91440"/>
+            <a:ext cx="73152" cy="274320"/>
+          </a:xfrm>
+          <a:prstGeom prst="rect">
+            <a:avLst/>
+          </a:prstGeom>
+          <a:solidFill>
+            <a:srgbClr val="0369A1"/>
+          </a:solidFill>
+          <a:ln w="12700">
+            <a:solidFill>
+              <a:srgbClr val="0369A1"/>
+            </a:solidFill>
+            <a:prstDash val="solid"/>
+          </a:ln>
+        </p:spPr>
+      </p:sp>
+      <p:pic>
+        <p:nvPicPr>
+          <p:cNvPr id="6" name="Image 0" descr="preencoded.png">    </p:cNvPr>
+          <p:cNvPicPr>
+            <a:picLocks noChangeAspect="1"/>
+          </p:cNvPicPr>
+          <p:nvPr/>
+        </p:nvPicPr>
+        <p:blipFill>
+          <a:blip r:embed="rId1"/>
+          <a:stretch>
+            <a:fillRect/>
+          </a:stretch>
+        </p:blipFill>
+        <p:spPr>
+          <a:xfrm>
+            <a:off x="8547049" y="128016"/>
+            <a:ext cx="201168" cy="201168"/>
+          </a:xfrm>
+          <a:prstGeom prst="rect">
+            <a:avLst/>
+          </a:prstGeom>
+        </p:spPr>
+      </p:pic>
+      <p:sp>
+        <p:nvSpPr>
+          <p:cNvPr id="7" name="Text 3"/>
+          <p:cNvSpPr txBox="1"/>
+          <p:nvPr/>
+        </p:nvSpPr>
+        <p:spPr>
+          <a:xfrm>
+            <a:off x="8803081" y="91440"/>
+            <a:ext cx="2803398" cy="274320"/>
+          </a:xfrm>
+          <a:prstGeom prst="rect">
+            <a:avLst/>
+          </a:prstGeom>
+          <a:noFill/>
+          <a:ln/>
+        </p:spPr>
+        <p:txBody>
+          <a:bodyPr wrap="square" lIns="0" tIns="0" rIns="0" bIns="0" rtlCol="0" anchor="ctr"/>
+          <a:lstStyle/>
+          <a:p>
+            <a:pPr indent="0" marL="0">
+              <a:buNone/>
+            </a:pPr>
+            <a:r>
+              <a:rPr lang="en-US" sz="1100" b="1" dirty="0">
+                <a:solidFill>
+                  <a:srgbClr val="075985"/>
+                </a:solidFill>
+                <a:latin typeface="Calibri" pitchFamily="34" charset="0"/>
+                <a:ea typeface="Calibri" pitchFamily="34" charset="-122"/>
+                <a:cs typeface="Calibri" pitchFamily="34" charset="-120"/>
+              </a:rPr>
+              <a:t>UNDERSTAND NOW</a:t>
+            </a:r>
+            <a:pPr indent="0" marL="0">
+              <a:buNone/>
+            </a:pPr>
+            <a:r>
+              <a:rPr lang="en-US" sz="1100" dirty="0">
+                <a:solidFill>
+                  <a:srgbClr val="075985"/>
+                </a:solidFill>
+                <a:latin typeface="Calibri" pitchFamily="34" charset="0"/>
+                <a:ea typeface="Calibri" pitchFamily="34" charset="-122"/>
+                <a:cs typeface="Calibri" pitchFamily="34" charset="-120"/>
+              </a:rPr>
+              <a:t> · the pieces of PRG32</a:t>
+            </a:r>
+            <a:endParaRPr lang="en-US" sz="1100" dirty="0"/>
+          </a:p>
+        </p:txBody>
+      </p:sp>
       <p:sp>
         <p:nvSpPr>
           <p:cNvPr id="25" name="Slide Number Placeholder 0"/>

--- a/en/slides/01-Computer_Architecture-PRG32_and_PRG32-QT_Setup.pptx
+++ b/en/slides/01-Computer_Architecture-PRG32_and_PRG32-QT_Setup.pptx
@@ -122,14 +122,14 @@
   <p:extLst>
     <p:ext uri="{521415D9-36F7-43E2-AB2F-B90AF26B5E84}">
       <p14:sectionLst xmlns:p14="http://schemas.microsoft.com/office/powerpoint/2010/main">
-        <p14:section name="Opening" id="{27ff9ed0-7460-9188-e40a-4ab697af9e03}">
+        <p14:section name="Opening" id="{fd134a5c-007b-7dc3-5564-89a20ca3ec9b}">
           <p14:sldIdLst>
             <p14:sldId id="256"/>
             <p14:sldId id="257"/>
             <p14:sldId id="258"/>
           </p14:sldIdLst>
         </p14:section>
-        <p14:section name="The platform, in detail" id="{abadef5d-034b-ae5d-3012-89f6625c4897}">
+        <p14:section name="The platform, in detail" id="{75ee62dc-a4dd-ef4e-dfcd-1bceea196d3b}">
           <p14:sldIdLst>
             <p14:sldId id="259"/>
             <p14:sldId id="260"/>
@@ -139,12 +139,12 @@
             <p14:sldId id="264"/>
           </p14:sldIdLst>
         </p14:section>
-        <p14:section name="Step 2: install the toolchain" id="{e22d9990-29ab-177e-f639-83046b93e5fb}">
+        <p14:section name="Step 2: install the toolchain" id="{8a7eb16f-d149-1594-08a4-7f3526ec29ff}">
           <p14:sldIdLst>
             <p14:sldId id="265"/>
           </p14:sldIdLst>
         </p14:section>
-        <p14:section name="When something does not work" id="{d035dc3c-dbe3-58df-2de7-0321974c9620}">
+        <p14:section name="When something does not work" id="{44806487-de40-5fa4-c5e2-17b14403e57e}">
           <p14:sldIdLst>
             <p14:sldId id="266"/>
             <p14:sldId id="267"/>

--- a/en/slides/01-Computer_Architecture-PRG32_and_PRG32-QT_Setup.pptx
+++ b/en/slides/01-Computer_Architecture-PRG32_and_PRG32-QT_Setup.pptx
@@ -122,14 +122,14 @@
   <p:extLst>
     <p:ext uri="{521415D9-36F7-43E2-AB2F-B90AF26B5E84}">
       <p14:sectionLst xmlns:p14="http://schemas.microsoft.com/office/powerpoint/2010/main">
-        <p14:section name="Opening" id="{fd134a5c-007b-7dc3-5564-89a20ca3ec9b}">
+        <p14:section name="Opening" id="{f90aed68-378d-2ddc-df4d-099787c4d9ea}">
           <p14:sldIdLst>
             <p14:sldId id="256"/>
             <p14:sldId id="257"/>
             <p14:sldId id="258"/>
           </p14:sldIdLst>
         </p14:section>
-        <p14:section name="The platform, in detail" id="{75ee62dc-a4dd-ef4e-dfcd-1bceea196d3b}">
+        <p14:section name="The platform, in detail" id="{b5f05463-7056-3d9f-3d97-8bcc5579146a}">
           <p14:sldIdLst>
             <p14:sldId id="259"/>
             <p14:sldId id="260"/>
@@ -139,12 +139,12 @@
             <p14:sldId id="264"/>
           </p14:sldIdLst>
         </p14:section>
-        <p14:section name="Step 2: install the toolchain" id="{8a7eb16f-d149-1594-08a4-7f3526ec29ff}">
+        <p14:section name="Step 2: install the toolchain" id="{877d4e86-c534-5bad-dc84-dabad5d0806d}">
           <p14:sldIdLst>
             <p14:sldId id="265"/>
           </p14:sldIdLst>
         </p14:section>
-        <p14:section name="When something does not work" id="{44806487-de40-5fa4-c5e2-17b14403e57e}">
+        <p14:section name="When something does not work" id="{2c254833-e89c-761b-c68d-2fdd67229fb0}">
           <p14:sldIdLst>
             <p14:sldId id="266"/>
             <p14:sldId id="267"/>
@@ -558,7 +558,7 @@
           <a:p>
             <a:r>
               <a:rPr lang="en-US" dirty="0"/>
-              <a:t>This lecture is a workshop, in both senses: you work with your hands, and you leave with a place where things can be made. Nothing here is theory. At the end your laptop runs PRG32-QT, the compiler for RISC-V is installed, and one cartridge built by you is stopped in the debugger. The quotation about the axe is the justification for spending two hours on tools: every later lecture assumes that building and running a program costs you one command and ten seconds.
+              <a:t>This lecture is a workshop in both senses of the word: a session of practical work, and the place in which all subsequent work will be done. It contains no theory. Its outcome is a configured environment: PRG32-QT running on the student's laptop, the RISC-V toolchain installed and verified, and a first cartridge built by the student and halted in the debugger. The epigraph about sharpening the axe justifies devoting two hours to tools: every later lecture presupposes that building and running a program costs a single command and a few seconds, so that attention can be spent on the ideas rather than on the procedure.
 Learning status: UNDERSTAND NOW, by the end of this lecture you explain it, trace it and apply it on your own; USE NOW, you follow and use the recipe today; how it works inside is explained later, or is not part of the course; UNDERSTAND LATER, recognise the name and what it is for; a later lecture explains it. A slide without a badge is context: a story, an example, a question, an exercise.
 Learning status of this lecture. UNDERSTAND NOW: the pieces of PRG32. USE NOW: the PRG32 tools, the PRG32-QT debugger, the complete program (used, not studied, in this course). UNDERSTAND LATER: the init, update, draw contract (Lecture 02); registers (Lecture 02). A slide without a badge is context: a story, an example, a question, an exercise.
 For the lecturer: New in 2026/27: a hands-on lecture. Students bring a laptop; at the end everyone has PRG32-QT running and a cartridge built by their own toolchain. The steps come from the README of PRG32, the documentation of PRG32-QT and chapter 3 of the textbook. The cartridge commands of step 3 were run on macOS against PRG32-QT; the Windows and Linux installations follow the official instructions and were not run for these slides. Ask the students to do the long download of step 2 at home, before the lecture: the classroom network will not survive sixty copies of ESP-IDF. Version numbers are those of October 2026: check the release pages before class.</a:t>
@@ -649,7 +649,7 @@
           <a:p>
             <a:r>
               <a:rPr lang="en-US" dirty="0"/>
-              <a:t>One idea explains every installation and nearly every problem. The compiler comes with ESP-IDF, the development kit of Espressif, installed for two chips: esp32c6, the kit, and esp32c3, the emulator. But ESP-IDF is not active by itself: each new terminal must switch it on before the tools can be found. The box on the right shows the message you will certainly meet, idf.py: command not found. It does not mean that something is broken. It means that ESP-IDF is not active in the terminal in which you are typing.
+              <a:t>A single idea explains every installation step and nearly every failure. The compiler is distributed with ESP-IDF, Espressif's development framework, installed for two targets: esp32c6, the kit, and esp32c3, the emulated chip. ESP-IDF, however, is not active by default: each new terminal must activate it before its tools can be located. The box on the right shows the message every student will eventually encounter, idf.py: command not found. It does not indicate a broken installation; it indicates that ESP-IDF has not been activated in the terminal in use.
 USE NOW: the PRG32 tools (used, not studied, in this course).
 For the lecturer: On Windows activating means opening the ESP-IDF PowerShell; on macOS and Linux, running export.sh. The symptom is always the same: idf.py, or riscv32-esp-elf-gcc, not found.</a:t>
             </a:r>
@@ -739,7 +739,7 @@
           <a:p>
             <a:r>
               <a:rPr lang="en-US" dirty="0"/>
-              <a:t>Read the table from left to right: what you see, what it means, what to do. The first row covers most cases: idf.py: command not found means that ESP-IDF is not active in this terminal. No module named prg32 means that you are not in the PRG32 folder. A refused connection means that PRG32-QT is not running, or that a firewall blocks port 8080. When you ask for help, paste the command and the complete message as text: a photograph of the screen cannot be searched or copied.
+              <a:t>The table is read from left to right: symptom, diagnosis, remedy. Its first row accounts for most cases: idf.py: command not found means that ESP-IDF is not active in the current terminal. No module named prg32 means that the command was not issued from the PRG32 folder. A refused connection means that PRG32-QT is not running, or that a firewall is blocking port 8080. When asking for help, the command and the complete message should be supplied as text: a photograph of a screen can be neither searched nor copied.
 USE NOW: the PRG32 tools (used, not studied, in this course).
 For the lecturer: The first row covers most of the cases. docs/usage/troubleshooting.md of the PRG32 repository has the complete list. When asking for help, paste the command and the whole message: never a photograph of the screen.</a:t>
             </a:r>
@@ -829,7 +829,7 @@
           <a:p>
             <a:r>
               <a:rPr lang="en-US" dirty="0"/>
-              <a:t>Five checks, one for each thing you did: PRG32-QT runs a game from the Store; in a new terminal the doctor shows only OK; cartridge build produces pong.prg32; upload-and-run starts it; in debug mode pause and step work. If one is missing, the last column tells you which step to repeat. Anyone who is stuck should come to office hours or to the laboratory before Lecture 02, with the laptop.
+              <a:t>Five checks, one for each step completed: PRG32-QT runs a game from the Store; in a fresh terminal the doctor reports only OK; cartridge build produces pong.prg32; upload-and-run starts it; and in debug mode pausing and stepping work. For any check that fails, the last column names the step to repeat. Students who remain blocked should attend office hours or the laboratory, with their laptop, before Lecture 02.
 For the lecturer: Five ticks and the workshop is ready. Anyone who is stuck comes to office hours, or to the laboratory, before Lecture 02: with the laptop.</a:t>
             </a:r>
             <a:endParaRPr lang="en-US" dirty="0"/>
@@ -918,8 +918,8 @@
           <a:p>
             <a:r>
               <a:rPr lang="en-US" dirty="0"/>
-              <a:t>Think about what "a new terminal" implies before you answer. Nothing was uninstalled, PRG32-QT is not involved in this command, and no board is needed for the doctor. Activation lasts as long as the terminal in which it was done, so a new terminal starts without it. The remedy is the one of the daily routine: export.sh, or the ESP-IDF PowerShell.
-The question separates two activities: building a cartridge and running one. A compiler is needed only for the first. The board and QEMU run the real firmware, which must be compiled; PRG32-QT interprets the cartridge and has its own debugger, so it is the only host that needs nothing else.
+              <a:t>Before answering the first question, consider what "a new terminal" implies. Nothing has been uninstalled, PRG32-QT plays no part in this command, and the doctor needs no board. Activation lasts only as long as the terminal in which it was performed, so a new terminal begins without it. The remedy is the routine one: export.sh, or the ESP-IDF PowerShell.
+The second question separates two activities: building a cartridge and running one. A compiler is needed only for the former. The board and QEMU execute the real firmware, which must itself be compiled; PRG32-QT interprets the cartridge and provides its own debugger, and is therefore the only host that requires nothing further.
 For the lecturer: 1. Answer: B. Activation lasts as long as the terminal: run export.sh, or open the ESP-IDF PowerShell.
 2. Answer: C. PRG32-QT interprets the cartridge and has a built-in debugger; a compiler is needed only to build cartridges.</a:t>
             </a:r>
@@ -1009,7 +1009,7 @@
           <a:p>
             <a:r>
               <a:rPr lang="en-US" dirty="0"/>
-              <a:t>The cartridge is not recompiled, and it does not contain three programs. A portable cartridge does not call the firmware at fixed addresses: it goes through a table of functions, the ABI, and each host provides that table. This is the meaning of the option --portable, and the reason why the file is the same in every column of the table of the three hosts.
+              <a:t>The cartridge is neither recompiled nor a bundle of three programs. A portable cartridge does not call the firmware at fixed addresses: it calls through a table of functions, the ABI, and each host supplies its own implementation of that table. This is the meaning of the --portable option, and the reason why the file is identical in every column of the table comparing the three hosts. The principle, a stable interface separating a program from the system that runs it, will recur throughout the course.
 For the lecturer: Answer: C. A portable cartridge depends only on the ABI, the table of functions of the runtime, which every host provides.</a:t>
             </a:r>
             <a:endParaRPr lang="en-US" dirty="0"/>
@@ -1098,7 +1098,7 @@
           <a:p>
             <a:r>
               <a:rPr lang="en-US" dirty="0"/>
-              <a:t>Ten terms that you will meet in every document about PRG32, with the Italian commonly used in class. Three deserve attention. A toolchain is the chain of programs that turns source into an executable: compiler, assembler, linker. To flash means to write a program into the flash memory of a chip. A host is the machine on which a cartridge runs: the board, QEMU or PRG32-QT.</a:t>
+              <a:t>Ten terms that recur in every document concerning PRG32, with the Italian usually employed in class. Three deserve particular attention. A toolchain is the sequence of programs that transforms source code into an executable: compiler, assembler and linker. To flash is to write a program into the flash memory of a chip. A host is the machine on which a cartridge runs: the board, QEMU or PRG32-QT.</a:t>
             </a:r>
             <a:endParaRPr lang="en-US" dirty="0"/>
           </a:p>
@@ -1186,7 +1186,7 @@
           <a:p>
             <a:r>
               <a:rPr lang="en-US" dirty="0"/>
-              <a:t>Four sentences to keep. PRG32 is a runtime, a cartridge format, a tool and a Store, and a cartridge runs unchanged on three hosts. PRG32-QT is enough to play and debug; ESP-IDF and the repository are needed to build. ESP-IDF must be activated in every new terminal. And you have completed the loop of the whole course: build, send, stop in the debugger. The readings are the README files of the two repositories; Lecture 02 uses this workshop for your first assembly program.
+              <a:t>Four propositions summarise the lecture. PRG32 is a runtime, a cartridge format, a tool and a Store, and a cartridge runs unchanged on three hosts. PRG32-QT suffices for playing and debugging; ESP-IDF and the repository are required for building. ESP-IDF must be activated in every new terminal. And the student has now completed the cycle on which the whole course rests: build, transmit, halt in the debugger. The recommended readings are the README files of the two repositories. Lecture 02 uses this workshop to write the first program in assembly.
 Learning status, recap. UNDERSTAND NOW: the pieces of PRG32. USE NOW: the PRG32 tools, the PRG32-QT debugger, the complete program (used, not studied, in this course). UNDERSTAND LATER: the init, update, draw contract (Lecture 02); registers (Lecture 02). A slide without a badge is context: a story, an example, a question, an exercise.
 For the lecturer: Next: Lecture 02, the first program in RISC-V assembly, typed by the students in the workshop they have just set up.</a:t>
             </a:r>
@@ -1276,7 +1276,7 @@
           <a:p>
             <a:r>
               <a:rPr lang="en-US" dirty="0"/>
-              <a:t>Five results, in the order in which you will reach them: a picture of the platform, PRG32-QT installed, the toolchain installed and checked, one cartridge built and stopped in the debugger, and a list of remedies for the usual failures. Treat it as a checklist. If you leave the lecture with the first two only, you can already follow the course; the third and the fourth must be in place before Lecture 02, when you write your first program.</a:t>
+              <a:t>Five outcomes, listed in the order in which they are reached: a conceptual picture of the platform; PRG32-QT installed; the toolchain installed and checked; one cartridge built and stopped in the debugger; and a repertoire of remedies for the usual failures. The list doubles as a checklist. The first two outcomes are sufficient to follow the course; the third and fourth must be in place before Lecture 02, in which the first program is written.</a:t>
             </a:r>
             <a:endParaRPr lang="en-US" dirty="0"/>
           </a:p>
@@ -1364,7 +1364,7 @@
           <a:p>
             <a:r>
               <a:rPr lang="en-US" dirty="0"/>
-              <a:t>The installation has four levels, and you do not need them all. Level 1, PRG32-QT, takes five minutes and lets you play and debug any cartridge. Level 2, ESP-IDF and the PRG32 repository, is a large download and lets you build your own cartridges: everybody needs it before Lecture 02. Level 3, the QEMU emulator, and level 4, the physical kit, are optional. The caption is the important line for anyone worried about costs: the course can be followed with levels 1 and 2, with no board.
+              <a:t>The installation is stratified into four levels, not all of which are required. Level 1, PRG32-QT, takes about five minutes and allows any cartridge to be played and debugged. Level 2, ESP-IDF together with the PRG32 repository, is a substantial download and enables the student to build cartridges; it is required by everyone before Lecture 02. Level 3, the QEMU emulator, and level 4, the physical kit, are optional. The caption addresses an important concern of equity: the entire course can be followed with levels 1 and 2 alone, without purchasing any hardware.
 For the lecturer: Level 1 takes five minutes. Level 2 is a large download and takes from half an hour to an hour: at home, on a good connection. Levels 3 and 4 are for the curious, and for the laboratory.</a:t>
             </a:r>
             <a:endParaRPr lang="en-US" dirty="0"/>
@@ -1453,7 +1453,7 @@
           <a:p>
             <a:r>
               <a:rPr lang="en-US" dirty="0"/>
-              <a:t>The name PRG32 covers four things. A firmware, the resident program that owns the screen, the buttons and the sound. A cartridge format, your game as one small file. A tool on your laptop, the command python3 -m prg32, which builds, uploads and packages. And a Store, where finished games are shared. Your code is real 32-bit RISC-V machine code, and it meets the firmware through a contract of three functions: init, called once, then update and draw, called at every frame. Lecture 02 starts exactly from this contract.
+              <a:t>The name PRG32 designates four distinct artefacts. A firmware: the resident program that owns the display, the buttons and the audio. A cartridge format: a game packaged as a single small file. A tool on the development machine, the command python3 -m prg32, which builds, uploads and packages cartridges. And a Store, where finished games are published. The student's code is genuine 32-bit RISC-V machine code, and it interacts with the firmware through a contract of three functions: init, invoked once, and update and draw, invoked at every frame. Lecture 02 takes this contract as its starting point.
 UNDERSTAND NOW: the pieces of PRG32.
 For the lecturer: github.com/riscv-prg32/PRG32. The runtime calls init once, then update and draw at every frame: Lecture 02 starts from this contract.</a:t>
             </a:r>
@@ -1543,7 +1543,7 @@
           <a:p>
             <a:r>
               <a:rPr lang="en-US" dirty="0"/>
-              <a:t>Follow a program from left to right. You write a source file in assembly or C. The compiler of the RISC-V toolchain turns it into machine code. The result is a cartridge, a file with code, data and a short header. The cartridge is uploaded over the network to a host, and there the runtime calls its three functions. The first three boxes live on your laptop and need level 2; the last two are a host, which can be PRG32-QT, QEMU or the board. The same file runs on all three because it reaches the runtime through a table of functions, the ABI.
+              <a:t>The slide traces a program through its life cycle, from left to right. A source file is written in assembly or C. The RISC-V toolchain translates it into machine code. The result is a cartridge: a file containing code, data and a short header. The cartridge is transmitted over the network to a host, whose runtime then calls the three entry points. The first three stages take place on the student's laptop and require level 2; the last two take place on a host, which may be PRG32-QT, QEMU or the board. One and the same file runs on all three because it reaches the runtime indirectly, through a table of functions: the application binary interface, or ABI, of PRG32.
 UNDERSTAND NOW: the pieces of PRG32.
 For the lecturer: The compiler is riscv32-esp-elf-gcc, installed by ESP-IDF. The cartridge is loaded at address 0x40800000 and reaches the runtime through a table of functions, the ABI: this is why the same file runs on three different hosts.</a:t>
             </a:r>
@@ -1633,7 +1633,7 @@
           <a:p>
             <a:r>
               <a:rPr lang="en-US" dirty="0"/>
-              <a:t>The kit is a small console built on a breadboard. Its heart is an ESP32-C6, a chip with one RISC-V core at 160 MHz and Wi-Fi. Around it there are a 2.8 inch colour display, one or two audio amplifiers, a joystick and a few buttons, each wired directly to a pin of the chip. Note the two numbers of the screen: the panel has 320 by 240 pixels, and games draw in an area of 320 by 200. A game reaches the board over Wi-Fi. You do not need a kit to follow the course; the laboratory has some.
+              <a:t>The kit is a small console assembled on a breadboard. Its core is an Espressif ESP32-C6, a chip with a single RISC-V core clocked at 160 MHz and an integrated Wi-Fi radio. Around it are a 2.8-inch colour display, one or two audio amplifiers, a joystick and a few buttons, each wired directly to a pin of the chip. Two numbers concerning the screen should be distinguished: the panel has 320 by 240 pixels, while games draw within a viewport of 320 by 200. Cartridges reach the board over Wi-Fi. A personal kit is not required to follow the course; the laboratory provides a number of them.
 UNDERSTAND NOW: the pieces of PRG32.
 For the lecturer: Display: ILI9341 over SPI. Audio: MAX98357A over I2S. The bill of materials and the wiring are in docs/hardware of the PRG32 repository. The laboratory has kits.</a:t>
             </a:r>
@@ -1723,7 +1723,7 @@
           <a:p>
             <a:r>
               <a:rPr lang="en-US" dirty="0"/>
-              <a:t>One cartridge, three hosts. Read the table by rows. On the board and in QEMU your code runs natively, on a real or an emulated chip; in PRG32-QT it is interpreted, one instruction after another. The board and QEMU need the toolchain; PRG32-QT does not, to play and to debug. Stepping through instructions needs extra tools on the first two, and is built into the third. A rule of thumb: use the board when you want the truth about time, and PRG32-QT when you want the truth about a register.
+              <a:t>One cartridge, three hosts, compared row by row. On the board and in QEMU the code runs natively, on a physical or an emulated chip respectively; in PRG32-QT it is interpreted, one instruction at a time. The board and QEMU require the toolchain, whereas PRG32-QT does not, either for playing or for debugging. Single-stepping requires additional tools on the first two hosts and is built into the third. A useful heuristic follows: the board is the authority on timing, PRG32-QT the authority on the content of a register.
 UNDERSTAND NOW: the pieces of PRG32.
 For the lecturer: Use the board when you want the truth about time, and PRG32-QT when you want the truth about a register. Why an ESP32-C3 in QEMU? Espressif maintains a mature emulator with graphics for that chip; it executes the same RISC-V instructions, and the cartridge does not notice.</a:t>
             </a:r>
@@ -1813,7 +1813,7 @@
           <a:p>
             <a:r>
               <a:rPr lang="en-US" dirty="0"/>
-              <a:t>PRG32-QT is the console as an application: it contains an interpreter of RV32IMAC and offers the cartridge the same functions as the firmware. Three things to remember. The speed profiles in Settings: Accurate, the default, timed like the ESP32-C6; Optimal, thirty frames per second; Unlimited. The Store browser, which downloads and runs published cartridges. And the debugger, which shows assembly, registers and memory and executes one instruction at a time. Accurate is the profile to keep: it tells you when your program would be too slow on the real chip.
+              <a:t>PRG32-QT is the console realised as an application: it contains an interpreter of the RV32IMAC instruction set and offers the cartridge the same services as the firmware. Three features matter. The speed profiles in Settings: Accurate, the default, which reproduces the timing of the ESP32-C6; Optimal, at thirty frames per second; and Unlimited. The Store browser, which downloads and runs published cartridges. And the debugger, which displays the disassembly, the registers and memory, and executes one instruction at a time. Accurate is the profile to retain, since it reveals when a program would be too slow on the real chip.
 UNDERSTAND NOW: the pieces of PRG32.
 For the lecturer: github.com/riscv-prg32/PRG32-QT. Accurate charges each instruction and each call a cost in cycles of a 160 MHz clock: not a cycle-exact model of the chip, but close enough to see when a frame is late.</a:t>
             </a:r>
@@ -1903,7 +1903,7 @@
           <a:p>
             <a:r>
               <a:rPr lang="en-US" dirty="0"/>
-              <a:t>On a keyboard the joystick is the arrow keys, or W A S D; button A is Z or J; button B is X or K; Start and Select are Enter or Space. In PRG32-QT, Escape leaves the game and returns to Setup. One detail of QEMU surprises everybody the first time: the keys must be typed in the terminal from which QEMU was started, not in the window that shows the picture. If a game in QEMU seems dead, click on the terminal.
+              <a:t>On a keyboard the joystick is mapped to the arrow keys or to W, A, S, D; button A to Z or J; button B to X or K; Start and Select to Enter or Space. In PRG32-QT, Escape leaves the game and returns to Setup. One property of QEMU routinely surprises first-time users: keystrokes must be typed into the terminal from which QEMU was launched, not into the window displaying the image. A game that appears unresponsive in QEMU usually only requires the terminal to be given focus.
 UNDERSTAND NOW: the pieces of PRG32.
 For the lecturer: A USB or Bluetooth game controller is recognised by PRG32-QT when it is plugged in. QEMU reads the keyboard from the terminal that launched it, not from the window with the picture: the classic surprise.</a:t>
             </a:r>
@@ -2983,7 +2983,7 @@
                 <a:ea typeface="Calibri" pitchFamily="34" charset="-122"/>
                 <a:cs typeface="Calibri" pitchFamily="34" charset="-120"/>
               </a:rPr>
-              <a:t>01-Computer_Architecture-PRG32_and_PRG32-QT_Setup-Code.pptx</a:t>
+              <a:t>01-Computer_Architecture-PRG32_and_PRG32-QT_Setup-Lab.pptx</a:t>
             </a:r>
             <a:endParaRPr lang="en-US" sz="1300" dirty="0"/>
           </a:p>

--- a/en/slides/01-Computer_Architecture-PRG32_and_PRG32-QT_Setup.pptx
+++ b/en/slides/01-Computer_Architecture-PRG32_and_PRG32-QT_Setup.pptx
@@ -126,14 +126,14 @@
   <p:extLst>
     <p:ext uri="{521415D9-36F7-43E2-AB2F-B90AF26B5E84}">
       <p14:sectionLst xmlns:p14="http://schemas.microsoft.com/office/powerpoint/2010/main">
-        <p14:section name="Opening" id="{fb5c1f3c-8194-ea4f-05dd-9cb84794a440}">
+        <p14:section name="Opening" id="{122de768-ca38-5212-eea0-eb1b520d4f8b}">
           <p14:sldIdLst>
             <p14:sldId id="256"/>
             <p14:sldId id="257"/>
             <p14:sldId id="258"/>
           </p14:sldIdLst>
         </p14:section>
-        <p14:section name="Before you start: the words of today" id="{8d595895-86ab-f79f-e1a6-f913d864d03f}">
+        <p14:section name="Before you start: the words of today" id="{b746ba6d-2e57-d7e7-e68a-12d769d6177d}">
           <p14:sldIdLst>
             <p14:sldId id="259"/>
             <p14:sldId id="260"/>
@@ -141,7 +141,7 @@
             <p14:sldId id="262"/>
           </p14:sldIdLst>
         </p14:section>
-        <p14:section name="The platform, in detail" id="{e1e964ee-9081-e5cc-a40a-74f952959a45}">
+        <p14:section name="The platform, in detail" id="{ff43d136-5764-f4a5-618d-9f7163c75c2a}">
           <p14:sldIdLst>
             <p14:sldId id="263"/>
             <p14:sldId id="264"/>
@@ -151,12 +151,12 @@
             <p14:sldId id="268"/>
           </p14:sldIdLst>
         </p14:section>
-        <p14:section name="Step 2: install the toolchain" id="{1884c810-84f5-80e8-2137-f1e1d61d999c}">
+        <p14:section name="Step 2: install the toolchain" id="{7e8e1a7c-0227-602b-3354-1b0d55420441}">
           <p14:sldIdLst>
             <p14:sldId id="269"/>
           </p14:sldIdLst>
         </p14:section>
-        <p14:section name="When something does not work" id="{2aa76f24-337d-ef34-76a2-a94e56b9fa7b}">
+        <p14:section name="When something does not work" id="{82e1e89f-bfd8-7601-c50d-4c5087809945}">
           <p14:sldIdLst>
             <p14:sldId id="270"/>
             <p14:sldId id="271"/>
@@ -573,6 +573,7 @@
               <a:t>This lecture is a workshop in both senses of the word: a session of practical work, and the place in which all subsequent work will be done. It contains no theory. Its outcome is a configured environment: PRG32-QT running on the student's laptop, the RISC-V toolchain installed and verified, and a first cartridge built by the student and halted in the debugger. The epigraph about sharpening the axe justifies devoting two hours to tools: every later lecture presupposes that building and running a program costs a single command and a few seconds, so that attention can be spent on the ideas rather than on the procedure.
 Learning status: UNDERSTAND NOW, by the end of this lecture you explain it, trace it and apply it on your own; USE NOW, you follow and use the recipe today; how it works inside is explained later, or is not part of the course; UNDERSTAND LATER, recognise the name and what it is for; a later lecture explains it. A slide without a badge is context: a story, an example, a question, an exercise.
 Learning status of this lecture. UNDERSTAND NOW: program, source and machine code; the pieces of PRG32. USE NOW: the terminal, the PRG32 tools, the PRG32-QT debugger, the complete program (used, not studied, in this course). UNDERSTAND LATER: the init, update, draw contract (Lecture 02); registers (Lecture 02). A slide without a badge is context: a story, an example, a question, an exercise.
+Roadmap. Today's outcomes: (1) explain the path from a source file to a running cartridge: source, translator, machine code, cartridge, host; (2) run a cartridge in PRG32-QT and build one with the terminal. Builds on: Lecture 00, and Starting from Zero for a reader who has never programmed. Next: Lecture 02, First Contact: RISC-V Assembly on PRG32.
 For the lecturer: New in 2026/27: a hands-on lecture. Students bring a laptop; at the end everyone has PRG32-QT running and a cartridge built by their own toolchain. The steps come from the README of PRG32, the documentation of PRG32-QT and chapter 3 of the textbook. The cartridge commands of step 3 were run on macOS against PRG32-QT; the Windows and Linux installations follow the official instructions and were not run for these slides. Ask the students to do the long download of step 2 at home, before the lecture: the classroom network will not survive sixty copies of ESP-IDF. Version numbers are those of October 2026: check the release pages before class.</a:t>
             </a:r>
             <a:endParaRPr lang="en-US" dirty="0"/>
@@ -1649,7 +1650,7 @@
             <a:r>
               <a:rPr lang="en-US" dirty="0"/>
               <a:t>Four propositions summarise the lecture. PRG32 is a runtime, a cartridge format, a tool and a Store, and a cartridge runs unchanged on three hosts. PRG32-QT suffices for playing and debugging; ESP-IDF and the repository are required for building. ESP-IDF must be activated in every new terminal. And the student has now completed the cycle on which the whole course rests: build, transmit, halt in the debugger. The recommended readings are the README files of the two repositories. Lecture 02 uses this workshop to write the first program in assembly.
-Learning status, recap. UNDERSTAND NOW: program, source and machine code; the pieces of PRG32. USE NOW: the terminal, the PRG32 tools, the PRG32-QT debugger, the complete program (used, not studied, in this course). UNDERSTAND LATER: the init, update, draw contract (Lecture 02); registers (Lecture 02). A slide without a badge is context: a story, an example, a question, an exercise.
+Learning status, recap. UNDERSTAND NOW: program, source and machine code; the pieces of PRG32. USE NOW: the terminal, the PRG32 tools, the PRG32-QT debugger, the complete program (used, not studied, in this course). UNDERSTAND LATER: the init, update, draw contract (Lecture 02); registers (Lecture 02). A slide without a badge is context: a story, an example, a question, an exercise. Closing thread: You now own the whole cycle: write a source file, translate it, send the cartridge to a host, stop it in the debugger. Next: writing the source file yourself. Exit ticket (two to four minutes, alone, on paper): 1. Put these four in order and say in one line what each does: the cartridge, the source file, the runtime of a host, the assembler. 2. In a new terminal you type python3 -m prg32 doctor and read: idf.py: command not found. What does the message tell you, and what do you do first?
 For the lecturer: Next: Lecture 02, the first program in RISC-V assembly, typed by the students in the workshop they have just set up.</a:t>
             </a:r>
             <a:endParaRPr lang="en-US" dirty="0"/>
